--- a/ppt/MachineLearning15-RandomForest.pptx
+++ b/ppt/MachineLearning15-RandomForest.pptx
@@ -5,16 +5,16 @@
     <p:sldMasterId id="2147483653" r:id="rId1"/>
   </p:sldMasterIdLst>
   <p:notesMasterIdLst>
-    <p:notesMasterId r:id="rId16"/>
+    <p:notesMasterId r:id="rId17"/>
   </p:notesMasterIdLst>
   <p:handoutMasterIdLst>
-    <p:handoutMasterId r:id="rId17"/>
+    <p:handoutMasterId r:id="rId18"/>
   </p:handoutMasterIdLst>
   <p:sldIdLst>
     <p:sldId id="264" r:id="rId2"/>
-    <p:sldId id="265" r:id="rId3"/>
-    <p:sldId id="266" r:id="rId4"/>
-    <p:sldId id="267" r:id="rId5"/>
+    <p:sldId id="266" r:id="rId3"/>
+    <p:sldId id="267" r:id="rId4"/>
+    <p:sldId id="362" r:id="rId5"/>
     <p:sldId id="279" r:id="rId6"/>
     <p:sldId id="268" r:id="rId7"/>
     <p:sldId id="285" r:id="rId8"/>
@@ -23,8 +23,9 @@
     <p:sldId id="282" r:id="rId11"/>
     <p:sldId id="283" r:id="rId12"/>
     <p:sldId id="284" r:id="rId13"/>
-    <p:sldId id="361" r:id="rId14"/>
-    <p:sldId id="281" r:id="rId15"/>
+    <p:sldId id="300" r:id="rId14"/>
+    <p:sldId id="361" r:id="rId15"/>
+    <p:sldId id="281" r:id="rId16"/>
   </p:sldIdLst>
   <p:sldSz cx="9144000" cy="6858000" type="screen4x3"/>
   <p:notesSz cx="6648450" cy="9782175"/>
@@ -3691,9 +3692,12 @@
             <a:pPr eaLnBrk="1" hangingPunct="1"/>
             <a:r>
               <a:rPr lang="fr-FR" altLang="fr-FR" dirty="0" err="1"/>
-              <a:t>RandomForest</a:t>
-            </a:r>
-            <a:endParaRPr lang="fr-FR" altLang="fr-FR" dirty="0"/>
+              <a:t>Random</a:t>
+            </a:r>
+            <a:r>
+              <a:rPr lang="fr-FR" altLang="fr-FR" dirty="0"/>
+              <a:t> Forest</a:t>
+            </a:r>
           </a:p>
         </p:txBody>
       </p:sp>
@@ -4483,6 +4487,178 @@
           <p:cNvPr id="2" name="Titre 1">
             <a:extLst>
               <a:ext uri="{FF2B5EF4-FFF2-40B4-BE49-F238E27FC236}">
+                <a16:creationId xmlns:a16="http://schemas.microsoft.com/office/drawing/2014/main" id="{075EC8CF-5940-5BF8-24F8-47088357EEEE}"/>
+              </a:ext>
+            </a:extLst>
+          </p:cNvPr>
+          <p:cNvSpPr>
+            <a:spLocks noGrp="1"/>
+          </p:cNvSpPr>
+          <p:nvPr>
+            <p:ph type="title"/>
+          </p:nvPr>
+        </p:nvSpPr>
+        <p:spPr/>
+        <p:txBody>
+          <a:bodyPr/>
+          <a:lstStyle/>
+          <a:p>
+            <a:r>
+              <a:rPr lang="fr-FR" dirty="0" err="1"/>
+              <a:t>EMLearn</a:t>
+            </a:r>
+            <a:r>
+              <a:rPr lang="fr-FR" dirty="0"/>
+              <a:t> Python</a:t>
+            </a:r>
+          </a:p>
+        </p:txBody>
+      </p:sp>
+      <p:sp>
+        <p:nvSpPr>
+          <p:cNvPr id="3" name="Espace réservé du contenu 2">
+            <a:extLst>
+              <a:ext uri="{FF2B5EF4-FFF2-40B4-BE49-F238E27FC236}">
+                <a16:creationId xmlns:a16="http://schemas.microsoft.com/office/drawing/2014/main" id="{4AE321F9-A7CC-0926-30B3-A801A51F44E7}"/>
+              </a:ext>
+            </a:extLst>
+          </p:cNvPr>
+          <p:cNvSpPr>
+            <a:spLocks noGrp="1"/>
+          </p:cNvSpPr>
+          <p:nvPr>
+            <p:ph idx="1"/>
+          </p:nvPr>
+        </p:nvSpPr>
+        <p:spPr/>
+        <p:txBody>
+          <a:bodyPr/>
+          <a:lstStyle/>
+          <a:p>
+            <a:r>
+              <a:rPr lang="fr-FR" dirty="0" err="1"/>
+              <a:t>EMLearn</a:t>
+            </a:r>
+            <a:r>
+              <a:rPr lang="fr-FR" dirty="0"/>
+              <a:t> propose également une API Python pour pouvoir sauvegarder des modèles et des </a:t>
+            </a:r>
+            <a:r>
+              <a:rPr lang="fr-FR" dirty="0" err="1"/>
+              <a:t>scalers</a:t>
+            </a:r>
+            <a:endParaRPr lang="fr-FR" dirty="0"/>
+          </a:p>
+          <a:p>
+            <a:pPr lvl="1"/>
+            <a:r>
+              <a:rPr lang="fr-FR" dirty="0" err="1"/>
+              <a:t>cmodel</a:t>
+            </a:r>
+            <a:r>
+              <a:rPr lang="fr-FR" dirty="0"/>
+              <a:t> = </a:t>
+            </a:r>
+            <a:r>
+              <a:rPr lang="fr-FR" dirty="0" err="1"/>
+              <a:t>emlearn.convert</a:t>
+            </a:r>
+            <a:r>
+              <a:rPr lang="fr-FR" dirty="0"/>
+              <a:t>(model, </a:t>
+            </a:r>
+            <a:r>
+              <a:rPr lang="fr-FR" dirty="0" err="1"/>
+              <a:t>method</a:t>
+            </a:r>
+            <a:r>
+              <a:rPr lang="fr-FR" dirty="0"/>
+              <a:t>='</a:t>
+            </a:r>
+            <a:r>
+              <a:rPr lang="fr-FR" dirty="0" err="1"/>
+              <a:t>inline</a:t>
+            </a:r>
+            <a:r>
+              <a:rPr lang="fr-FR" dirty="0"/>
+              <a:t>')</a:t>
+            </a:r>
+          </a:p>
+          <a:p>
+            <a:pPr lvl="1"/>
+            <a:r>
+              <a:rPr lang="fr-FR" dirty="0" err="1"/>
+              <a:t>cmodel.save</a:t>
+            </a:r>
+            <a:r>
+              <a:rPr lang="fr-FR" dirty="0"/>
+              <a:t>(file="</a:t>
+            </a:r>
+            <a:r>
+              <a:rPr lang="fr-FR" dirty="0" err="1"/>
+              <a:t>path</a:t>
+            </a:r>
+            <a:r>
+              <a:rPr lang="fr-FR" dirty="0"/>
+              <a:t>", </a:t>
+            </a:r>
+            <a:r>
+              <a:rPr lang="fr-FR" dirty="0" err="1"/>
+              <a:t>name</a:t>
+            </a:r>
+            <a:r>
+              <a:rPr lang="fr-FR" dirty="0"/>
+              <a:t>='</a:t>
+            </a:r>
+            <a:r>
+              <a:rPr lang="fr-FR" dirty="0" err="1"/>
+              <a:t>rf</a:t>
+            </a:r>
+            <a:r>
+              <a:rPr lang="fr-FR" dirty="0"/>
+              <a:t>', format='csv')</a:t>
+            </a:r>
+          </a:p>
+          <a:p>
+            <a:endParaRPr lang="fr-FR" dirty="0"/>
+          </a:p>
+        </p:txBody>
+      </p:sp>
+    </p:spTree>
+    <p:extLst>
+      <p:ext uri="{BB962C8B-B14F-4D97-AF65-F5344CB8AC3E}">
+        <p14:creationId xmlns:p14="http://schemas.microsoft.com/office/powerpoint/2010/main" val="1791051253"/>
+      </p:ext>
+    </p:extLst>
+  </p:cSld>
+  <p:clrMapOvr>
+    <a:masterClrMapping/>
+  </p:clrMapOvr>
+</p:sld>
+</file>
+
+<file path=ppt/slides/slide14.xml><?xml version="1.0" encoding="utf-8"?>
+<p:sld xmlns:a="http://schemas.openxmlformats.org/drawingml/2006/main" xmlns:r="http://schemas.openxmlformats.org/officeDocument/2006/relationships" xmlns:p="http://schemas.openxmlformats.org/presentationml/2006/main">
+  <p:cSld>
+    <p:spTree>
+      <p:nvGrpSpPr>
+        <p:cNvPr id="1" name=""/>
+        <p:cNvGrpSpPr/>
+        <p:nvPr/>
+      </p:nvGrpSpPr>
+      <p:grpSpPr>
+        <a:xfrm>
+          <a:off x="0" y="0"/>
+          <a:ext cx="0" cy="0"/>
+          <a:chOff x="0" y="0"/>
+          <a:chExt cx="0" cy="0"/>
+        </a:xfrm>
+      </p:grpSpPr>
+      <p:sp>
+        <p:nvSpPr>
+          <p:cNvPr id="2" name="Titre 1">
+            <a:extLst>
+              <a:ext uri="{FF2B5EF4-FFF2-40B4-BE49-F238E27FC236}">
                 <a16:creationId xmlns:a16="http://schemas.microsoft.com/office/drawing/2014/main" id="{D9B0984B-C31F-4507-B93B-379E1A983053}"/>
               </a:ext>
             </a:extLst>
@@ -4797,7 +4973,7 @@
 </p:sld>
 </file>
 
-<file path=ppt/slides/slide14.xml><?xml version="1.0" encoding="utf-8"?>
+<file path=ppt/slides/slide15.xml><?xml version="1.0" encoding="utf-8"?>
 <p:sld xmlns:a="http://schemas.openxmlformats.org/drawingml/2006/main" xmlns:r="http://schemas.openxmlformats.org/officeDocument/2006/relationships" xmlns:p="http://schemas.openxmlformats.org/presentationml/2006/main">
   <p:cSld>
     <p:spTree>
@@ -4972,8 +5148,12 @@
           <a:lstStyle/>
           <a:p>
             <a:r>
+              <a:rPr lang="fr-FR" dirty="0" err="1"/>
+              <a:t>Random</a:t>
+            </a:r>
+            <a:r>
               <a:rPr lang="fr-FR" dirty="0"/>
-              <a:t>Autres modèles</a:t>
+              <a:t> Forest</a:t>
             </a:r>
           </a:p>
         </p:txBody>
@@ -4995,29 +5175,37 @@
           <a:p>
             <a:r>
               <a:rPr lang="fr-FR" dirty="0"/>
-              <a:t>Il existe de nombreux autres modèles de classification</a:t>
-            </a:r>
-          </a:p>
-          <a:p>
-            <a:pPr lvl="1"/>
+              <a:t>Les forêts d'arbres décisionnels ont été formellement proposées en 2001 par Leo </a:t>
+            </a:r>
             <a:r>
               <a:rPr lang="fr-FR" dirty="0" err="1"/>
-              <a:t>RandomForest</a:t>
+              <a:t>Breiman</a:t>
+            </a:r>
+            <a:r>
+              <a:rPr lang="fr-FR" dirty="0"/>
+              <a:t> et Adèle </a:t>
+            </a:r>
+            <a:r>
+              <a:rPr lang="fr-FR" dirty="0" err="1"/>
+              <a:t>Cutler</a:t>
             </a:r>
             <a:endParaRPr lang="fr-FR" dirty="0"/>
           </a:p>
           <a:p>
-            <a:pPr lvl="1"/>
             <a:r>
               <a:rPr lang="fr-FR" dirty="0"/>
-              <a:t>KVM</a:t>
-            </a:r>
-          </a:p>
-          <a:p>
-            <a:pPr lvl="1"/>
+              <a:t>Cet algorithme combine les concepts de sous-espaces aléatoires et de </a:t>
+            </a:r>
+            <a:r>
+              <a:rPr lang="fr-FR" dirty="0" err="1"/>
+              <a:t>bagging</a:t>
+            </a:r>
+            <a:endParaRPr lang="fr-FR" dirty="0"/>
+          </a:p>
+          <a:p>
             <a:r>
               <a:rPr lang="fr-FR" dirty="0"/>
-              <a:t>…</a:t>
+              <a:t>L'algorithme des forêts d'arbres décisionnels effectue un apprentissage sur de multiples arbres de décision entraînés sur des sous-ensembles de données légèrement différents</a:t>
             </a:r>
           </a:p>
         </p:txBody>
@@ -5025,7 +5213,7 @@
     </p:spTree>
     <p:extLst>
       <p:ext uri="{BB962C8B-B14F-4D97-AF65-F5344CB8AC3E}">
-        <p14:creationId xmlns:p14="http://schemas.microsoft.com/office/powerpoint/2010/main" val="889605795"/>
+        <p14:creationId xmlns:p14="http://schemas.microsoft.com/office/powerpoint/2010/main" val="3428597560"/>
       </p:ext>
     </p:extLst>
   </p:cSld>
@@ -5093,39 +5281,62 @@
           <a:bodyPr/>
           <a:lstStyle/>
           <a:p>
-            <a:r>
-              <a:rPr lang="fr-FR" dirty="0"/>
-              <a:t>Les forêts d'arbres décisionnels ont été formellement proposées en 2001 par Leo </a:t>
-            </a:r>
-            <a:r>
-              <a:rPr lang="fr-FR" dirty="0" err="1"/>
-              <a:t>Breiman</a:t>
-            </a:r>
-            <a:r>
-              <a:rPr lang="fr-FR" dirty="0"/>
-              <a:t> et Adèle </a:t>
-            </a:r>
-            <a:r>
-              <a:rPr lang="fr-FR" dirty="0" err="1"/>
-              <a:t>Cutler</a:t>
-            </a:r>
-            <a:endParaRPr lang="fr-FR" dirty="0"/>
-          </a:p>
-          <a:p>
-            <a:r>
-              <a:rPr lang="fr-FR" dirty="0"/>
-              <a:t>Cet algorithme combine les concepts de sous-espaces aléatoires et de </a:t>
-            </a:r>
-            <a:r>
-              <a:rPr lang="fr-FR" dirty="0" err="1"/>
-              <a:t>bagging</a:t>
-            </a:r>
-            <a:endParaRPr lang="fr-FR" dirty="0"/>
-          </a:p>
-          <a:p>
-            <a:r>
-              <a:rPr lang="fr-FR" dirty="0"/>
-              <a:t>L'algorithme des forêts d'arbres décisionnels effectue un apprentissage sur de multiples arbres de décision entraînés sur des sous-ensembles de données légèrement différents</a:t>
+            <a:pPr marL="0" indent="0">
+              <a:buNone/>
+            </a:pPr>
+            <a:r>
+              <a:rPr lang="fr-FR" sz="2400" dirty="0"/>
+              <a:t>On créé B nouveaux ensembles d'apprentissage par un double processus d'échantillonnage :</a:t>
+            </a:r>
+          </a:p>
+          <a:p>
+            <a:pPr lvl="1"/>
+            <a:r>
+              <a:rPr lang="fr-FR" sz="2000" dirty="0"/>
+              <a:t>sur les observations, en utilisant un tirage avec remise d'un nombre N d'observations identique à celui des données d'origine</a:t>
+            </a:r>
+          </a:p>
+          <a:p>
+            <a:pPr lvl="1"/>
+            <a:r>
+              <a:rPr lang="fr-FR" sz="2000" dirty="0"/>
+              <a:t>et sur les p prédicteurs, en n'en retenant qu'un échantillon de cardinal m &lt; </a:t>
+            </a:r>
+            <a:r>
+              <a:rPr lang="fr-FR" sz="2000" dirty="0" err="1"/>
+              <a:t>sqrt</a:t>
+            </a:r>
+            <a:r>
+              <a:rPr lang="fr-FR" sz="2000" dirty="0"/>
+              <a:t>(p)</a:t>
+            </a:r>
+          </a:p>
+          <a:p>
+            <a:pPr lvl="1"/>
+            <a:r>
+              <a:rPr lang="fr-FR" sz="2000" dirty="0"/>
+              <a:t>Sur chaque échantillon, on entraîne un arbre de décision selon une des techniques connues, en limitant sa croissance par validation croisée</a:t>
+            </a:r>
+          </a:p>
+          <a:p>
+            <a:pPr lvl="1"/>
+            <a:r>
+              <a:rPr lang="fr-FR" sz="2000" dirty="0"/>
+              <a:t>On stocke les B prédictions de la variable d'intérêt pour chaque observation d'origine.</a:t>
+            </a:r>
+          </a:p>
+          <a:p>
+            <a:pPr lvl="1"/>
+            <a:r>
+              <a:rPr lang="fr-FR" sz="2000" dirty="0"/>
+              <a:t>La prédiction de la forêt aléatoire est alors un simple vote majoritaire</a:t>
+            </a:r>
+          </a:p>
+          <a:p>
+            <a:pPr lvl="1"/>
+            <a:r>
+              <a:rPr lang="fr-FR" sz="2000" dirty="0"/>
+              <a:t>Le principal revers de cette méthode est que l'on perd l'aspect visuel des arbres de décision uniques</a:t>
             </a:r>
           </a:p>
         </p:txBody>
@@ -5133,7 +5344,7 @@
     </p:spTree>
     <p:extLst>
       <p:ext uri="{BB962C8B-B14F-4D97-AF65-F5344CB8AC3E}">
-        <p14:creationId xmlns:p14="http://schemas.microsoft.com/office/powerpoint/2010/main" val="3428597560"/>
+        <p14:creationId xmlns:p14="http://schemas.microsoft.com/office/powerpoint/2010/main" val="1192625679"/>
       </p:ext>
     </p:extLst>
   </p:cSld>
@@ -5162,7 +5373,13 @@
       </p:grpSpPr>
       <p:sp>
         <p:nvSpPr>
-          <p:cNvPr id="2" name="Titre 1"/>
+          <p:cNvPr id="2" name="Titre 1">
+            <a:extLst>
+              <a:ext uri="{FF2B5EF4-FFF2-40B4-BE49-F238E27FC236}">
+                <a16:creationId xmlns:a16="http://schemas.microsoft.com/office/drawing/2014/main" id="{0479AA96-9460-A972-2FFF-372DBDD0E639}"/>
+              </a:ext>
+            </a:extLst>
+          </p:cNvPr>
           <p:cNvSpPr>
             <a:spLocks noGrp="1"/>
           </p:cNvSpPr>
@@ -5175,20 +5392,19 @@
           <a:bodyPr/>
           <a:lstStyle/>
           <a:p>
-            <a:r>
-              <a:rPr lang="fr-FR" dirty="0" err="1"/>
-              <a:t>Random</a:t>
-            </a:r>
-            <a:r>
-              <a:rPr lang="fr-FR" dirty="0"/>
-              <a:t> Forest</a:t>
-            </a:r>
+            <a:endParaRPr lang="fr-FR"/>
           </a:p>
         </p:txBody>
       </p:sp>
       <p:sp>
         <p:nvSpPr>
-          <p:cNvPr id="3" name="Espace réservé du contenu 2"/>
+          <p:cNvPr id="3" name="Espace réservé du contenu 2">
+            <a:extLst>
+              <a:ext uri="{FF2B5EF4-FFF2-40B4-BE49-F238E27FC236}">
+                <a16:creationId xmlns:a16="http://schemas.microsoft.com/office/drawing/2014/main" id="{A34D6FF6-8E53-6101-CF7B-BFEC81DBE983}"/>
+              </a:ext>
+            </a:extLst>
+          </p:cNvPr>
           <p:cNvSpPr>
             <a:spLocks noGrp="1"/>
           </p:cNvSpPr>
@@ -5201,70 +5417,14 @@
           <a:bodyPr/>
           <a:lstStyle/>
           <a:p>
-            <a:pPr marL="0" indent="0">
-              <a:buNone/>
-            </a:pPr>
-            <a:r>
-              <a:rPr lang="fr-FR" sz="2400" dirty="0"/>
-              <a:t>On créé B nouveaux ensembles d'apprentissage par un double processus d'échantillonnage :</a:t>
-            </a:r>
-          </a:p>
-          <a:p>
-            <a:pPr lvl="1"/>
-            <a:r>
-              <a:rPr lang="fr-FR" sz="2000" dirty="0"/>
-              <a:t>sur les observations, en utilisant un tirage avec remise d'un nombre N d'observations identique à celui des données d'origine</a:t>
-            </a:r>
-          </a:p>
-          <a:p>
-            <a:pPr lvl="1"/>
-            <a:r>
-              <a:rPr lang="fr-FR" sz="2000" dirty="0"/>
-              <a:t>et sur les p prédicteurs, en n'en retenant qu'un échantillon de cardinal m &lt; </a:t>
-            </a:r>
-            <a:r>
-              <a:rPr lang="fr-FR" sz="2000" dirty="0" err="1"/>
-              <a:t>sqrt</a:t>
-            </a:r>
-            <a:r>
-              <a:rPr lang="fr-FR" sz="2000" dirty="0"/>
-              <a:t>(p)</a:t>
-            </a:r>
-          </a:p>
-          <a:p>
-            <a:pPr lvl="1"/>
-            <a:r>
-              <a:rPr lang="fr-FR" sz="2000" dirty="0"/>
-              <a:t>Sur chaque échantillon, on entraîne un arbre de décision selon une des techniques connues, en limitant sa croissance par validation croisée</a:t>
-            </a:r>
-          </a:p>
-          <a:p>
-            <a:pPr lvl="1"/>
-            <a:r>
-              <a:rPr lang="fr-FR" sz="2000" dirty="0"/>
-              <a:t>On stocke les B prédictions de la variable d'intérêt pour chaque observation d'origine.</a:t>
-            </a:r>
-          </a:p>
-          <a:p>
-            <a:pPr lvl="1"/>
-            <a:r>
-              <a:rPr lang="fr-FR" sz="2000" dirty="0"/>
-              <a:t>La prédiction de la forêt aléatoire est alors un simple vote majoritaire</a:t>
-            </a:r>
-          </a:p>
-          <a:p>
-            <a:pPr lvl="1"/>
-            <a:r>
-              <a:rPr lang="fr-FR" sz="2000" dirty="0"/>
-              <a:t>Le principal revers de cette méthode est que l'on perd l'aspect visuel des arbres de décision uniques</a:t>
-            </a:r>
+            <a:endParaRPr lang="fr-FR"/>
           </a:p>
         </p:txBody>
       </p:sp>
     </p:spTree>
     <p:extLst>
       <p:ext uri="{BB962C8B-B14F-4D97-AF65-F5344CB8AC3E}">
-        <p14:creationId xmlns:p14="http://schemas.microsoft.com/office/powerpoint/2010/main" val="1192625679"/>
+        <p14:creationId xmlns:p14="http://schemas.microsoft.com/office/powerpoint/2010/main" val="3168784124"/>
       </p:ext>
     </p:extLst>
   </p:cSld>

--- a/ppt/MachineLearning15-RandomForest.pptx
+++ b/ppt/MachineLearning15-RandomForest.pptx
@@ -5,27 +5,23 @@
     <p:sldMasterId id="2147483653" r:id="rId1"/>
   </p:sldMasterIdLst>
   <p:notesMasterIdLst>
-    <p:notesMasterId r:id="rId17"/>
+    <p:notesMasterId r:id="rId13"/>
   </p:notesMasterIdLst>
   <p:handoutMasterIdLst>
-    <p:handoutMasterId r:id="rId18"/>
+    <p:handoutMasterId r:id="rId14"/>
   </p:handoutMasterIdLst>
   <p:sldIdLst>
     <p:sldId id="264" r:id="rId2"/>
     <p:sldId id="266" r:id="rId3"/>
     <p:sldId id="267" r:id="rId4"/>
-    <p:sldId id="362" r:id="rId5"/>
-    <p:sldId id="279" r:id="rId6"/>
-    <p:sldId id="268" r:id="rId7"/>
-    <p:sldId id="285" r:id="rId8"/>
-    <p:sldId id="280" r:id="rId9"/>
-    <p:sldId id="278" r:id="rId10"/>
-    <p:sldId id="282" r:id="rId11"/>
-    <p:sldId id="283" r:id="rId12"/>
-    <p:sldId id="284" r:id="rId13"/>
-    <p:sldId id="300" r:id="rId14"/>
-    <p:sldId id="361" r:id="rId15"/>
-    <p:sldId id="281" r:id="rId16"/>
+    <p:sldId id="268" r:id="rId5"/>
+    <p:sldId id="285" r:id="rId6"/>
+    <p:sldId id="280" r:id="rId7"/>
+    <p:sldId id="278" r:id="rId8"/>
+    <p:sldId id="282" r:id="rId9"/>
+    <p:sldId id="283" r:id="rId10"/>
+    <p:sldId id="284" r:id="rId11"/>
+    <p:sldId id="281" r:id="rId12"/>
   </p:sldIdLst>
   <p:sldSz cx="9144000" cy="6858000" type="screen4x3"/>
   <p:notesSz cx="6648450" cy="9782175"/>
@@ -3819,9 +3815,10 @@
           <a:lstStyle/>
           <a:p>
             <a:r>
-              <a:rPr lang="fr-FR" dirty="0"/>
-              <a:t>Sérialisation du modèle</a:t>
-            </a:r>
+              <a:rPr lang="fr-FR" dirty="0" err="1"/>
+              <a:t>Pickle</a:t>
+            </a:r>
+            <a:endParaRPr lang="fr-FR" dirty="0"/>
           </a:p>
         </p:txBody>
       </p:sp>
@@ -3842,560 +3839,6 @@
           <a:p>
             <a:r>
               <a:rPr lang="fr-FR" dirty="0"/>
-              <a:t>Transformation d’un objet en binaire</a:t>
-            </a:r>
-          </a:p>
-          <a:p>
-            <a:pPr lvl="1"/>
-            <a:r>
-              <a:rPr lang="fr-FR" dirty="0"/>
-              <a:t>Sérialisation</a:t>
-            </a:r>
-          </a:p>
-          <a:p>
-            <a:pPr lvl="1"/>
-            <a:r>
-              <a:rPr lang="fr-FR" dirty="0" err="1"/>
-              <a:t>Marshalling</a:t>
-            </a:r>
-            <a:endParaRPr lang="fr-FR" dirty="0"/>
-          </a:p>
-          <a:p>
-            <a:r>
-              <a:rPr lang="fr-FR" dirty="0"/>
-              <a:t>Transformation inverse</a:t>
-            </a:r>
-          </a:p>
-          <a:p>
-            <a:pPr lvl="1"/>
-            <a:r>
-              <a:rPr lang="fr-FR" dirty="0" err="1"/>
-              <a:t>Désérialisation</a:t>
-            </a:r>
-            <a:endParaRPr lang="fr-FR" dirty="0"/>
-          </a:p>
-          <a:p>
-            <a:pPr lvl="1"/>
-            <a:r>
-              <a:rPr lang="fr-FR" dirty="0" err="1"/>
-              <a:t>Unmarshalling</a:t>
-            </a:r>
-            <a:endParaRPr lang="fr-FR" dirty="0"/>
-          </a:p>
-        </p:txBody>
-      </p:sp>
-    </p:spTree>
-    <p:extLst>
-      <p:ext uri="{BB962C8B-B14F-4D97-AF65-F5344CB8AC3E}">
-        <p14:creationId xmlns:p14="http://schemas.microsoft.com/office/powerpoint/2010/main" val="131513215"/>
-      </p:ext>
-    </p:extLst>
-  </p:cSld>
-  <p:clrMapOvr>
-    <a:masterClrMapping/>
-  </p:clrMapOvr>
-</p:sld>
-</file>
-
-<file path=ppt/slides/slide11.xml><?xml version="1.0" encoding="utf-8"?>
-<p:sld xmlns:a="http://schemas.openxmlformats.org/drawingml/2006/main" xmlns:r="http://schemas.openxmlformats.org/officeDocument/2006/relationships" xmlns:p="http://schemas.openxmlformats.org/presentationml/2006/main">
-  <p:cSld>
-    <p:spTree>
-      <p:nvGrpSpPr>
-        <p:cNvPr id="1" name=""/>
-        <p:cNvGrpSpPr/>
-        <p:nvPr/>
-      </p:nvGrpSpPr>
-      <p:grpSpPr>
-        <a:xfrm>
-          <a:off x="0" y="0"/>
-          <a:ext cx="0" cy="0"/>
-          <a:chOff x="0" y="0"/>
-          <a:chExt cx="0" cy="0"/>
-        </a:xfrm>
-      </p:grpSpPr>
-      <p:sp>
-        <p:nvSpPr>
-          <p:cNvPr id="2" name="Titre 1"/>
-          <p:cNvSpPr>
-            <a:spLocks noGrp="1"/>
-          </p:cNvSpPr>
-          <p:nvPr>
-            <p:ph type="title"/>
-          </p:nvPr>
-        </p:nvSpPr>
-        <p:spPr/>
-        <p:txBody>
-          <a:bodyPr/>
-          <a:lstStyle/>
-          <a:p>
-            <a:r>
-              <a:rPr lang="fr-FR" dirty="0" err="1"/>
-              <a:t>Pickle</a:t>
-            </a:r>
-            <a:endParaRPr lang="fr-FR" dirty="0"/>
-          </a:p>
-        </p:txBody>
-      </p:sp>
-      <p:sp>
-        <p:nvSpPr>
-          <p:cNvPr id="3" name="Espace réservé du contenu 2"/>
-          <p:cNvSpPr>
-            <a:spLocks noGrp="1"/>
-          </p:cNvSpPr>
-          <p:nvPr>
-            <p:ph idx="1"/>
-          </p:nvPr>
-        </p:nvSpPr>
-        <p:spPr/>
-        <p:txBody>
-          <a:bodyPr/>
-          <a:lstStyle/>
-          <a:p>
-            <a:r>
-              <a:rPr lang="en-GB" altLang="fr-FR" dirty="0" err="1"/>
-              <a:t>C'est</a:t>
-            </a:r>
-            <a:r>
-              <a:rPr lang="en-GB" altLang="fr-FR" dirty="0"/>
-              <a:t> un module </a:t>
-            </a:r>
-            <a:r>
-              <a:rPr lang="en-GB" altLang="fr-FR" dirty="0" err="1"/>
-              <a:t>étonnant</a:t>
-            </a:r>
-            <a:r>
-              <a:rPr lang="en-GB" altLang="fr-FR" dirty="0"/>
-              <a:t> qui </a:t>
-            </a:r>
-            <a:r>
-              <a:rPr lang="en-GB" altLang="fr-FR" dirty="0" err="1"/>
-              <a:t>peut</a:t>
-            </a:r>
-            <a:r>
-              <a:rPr lang="en-GB" altLang="fr-FR" dirty="0"/>
-              <a:t> </a:t>
-            </a:r>
-            <a:r>
-              <a:rPr lang="en-GB" altLang="fr-FR" dirty="0" err="1"/>
-              <a:t>prendre</a:t>
-            </a:r>
-            <a:r>
-              <a:rPr lang="en-GB" altLang="fr-FR" dirty="0"/>
-              <a:t> </a:t>
-            </a:r>
-            <a:r>
-              <a:rPr lang="en-GB" altLang="fr-FR" dirty="0" err="1"/>
-              <a:t>presque</a:t>
-            </a:r>
-            <a:r>
-              <a:rPr lang="en-GB" altLang="fr-FR" dirty="0"/>
-              <a:t> </a:t>
-            </a:r>
-            <a:r>
-              <a:rPr lang="en-GB" altLang="fr-FR" dirty="0" err="1"/>
-              <a:t>n'importe</a:t>
-            </a:r>
-            <a:r>
-              <a:rPr lang="en-GB" altLang="fr-FR" dirty="0"/>
-              <a:t> </a:t>
-            </a:r>
-            <a:r>
-              <a:rPr lang="en-GB" altLang="fr-FR" dirty="0" err="1"/>
-              <a:t>quel</a:t>
-            </a:r>
-            <a:r>
-              <a:rPr lang="en-GB" altLang="fr-FR" dirty="0"/>
-              <a:t> objet Python, et le </a:t>
-            </a:r>
-            <a:r>
-              <a:rPr lang="en-GB" altLang="fr-FR" dirty="0" err="1"/>
-              <a:t>convertir</a:t>
-            </a:r>
-            <a:r>
-              <a:rPr lang="en-GB" altLang="fr-FR" dirty="0"/>
-              <a:t> </a:t>
-            </a:r>
-            <a:r>
-              <a:rPr lang="en-GB" altLang="fr-FR" dirty="0" err="1"/>
-              <a:t>en</a:t>
-            </a:r>
-            <a:r>
-              <a:rPr lang="en-GB" altLang="fr-FR" dirty="0"/>
-              <a:t> </a:t>
-            </a:r>
-            <a:r>
-              <a:rPr lang="en-GB" altLang="fr-FR" dirty="0" err="1"/>
-              <a:t>une</a:t>
-            </a:r>
-            <a:r>
-              <a:rPr lang="en-GB" altLang="fr-FR" dirty="0"/>
-              <a:t> </a:t>
-            </a:r>
-            <a:r>
-              <a:rPr lang="en-GB" altLang="fr-FR" dirty="0" err="1"/>
-              <a:t>représentation</a:t>
-            </a:r>
-            <a:r>
-              <a:rPr lang="en-GB" altLang="fr-FR" dirty="0"/>
-              <a:t> sous </a:t>
-            </a:r>
-            <a:r>
-              <a:rPr lang="en-GB" altLang="fr-FR" dirty="0" err="1"/>
-              <a:t>forme</a:t>
-            </a:r>
-            <a:r>
-              <a:rPr lang="en-GB" altLang="fr-FR" dirty="0"/>
-              <a:t> de </a:t>
-            </a:r>
-            <a:r>
-              <a:rPr lang="en-GB" altLang="fr-FR" dirty="0" err="1"/>
-              <a:t>chaîne</a:t>
-            </a:r>
-            <a:r>
-              <a:rPr lang="en-GB" altLang="fr-FR" dirty="0"/>
-              <a:t> de </a:t>
-            </a:r>
-            <a:r>
-              <a:rPr lang="en-GB" altLang="fr-FR" dirty="0" err="1"/>
-              <a:t>caractères</a:t>
-            </a:r>
-            <a:endParaRPr lang="en-GB" altLang="fr-FR" dirty="0"/>
-          </a:p>
-          <a:p>
-            <a:r>
-              <a:rPr lang="en-GB" altLang="fr-FR" dirty="0"/>
-              <a:t>Ce </a:t>
-            </a:r>
-            <a:r>
-              <a:rPr lang="en-GB" altLang="fr-FR" dirty="0" err="1"/>
-              <a:t>processus</a:t>
-            </a:r>
-            <a:r>
-              <a:rPr lang="en-GB" altLang="fr-FR" dirty="0"/>
-              <a:t> </a:t>
-            </a:r>
-            <a:r>
-              <a:rPr lang="en-GB" altLang="fr-FR" dirty="0" err="1"/>
-              <a:t>s'appelle</a:t>
-            </a:r>
-            <a:r>
-              <a:rPr lang="en-GB" altLang="fr-FR" dirty="0"/>
-              <a:t> </a:t>
-            </a:r>
-            <a:r>
-              <a:rPr lang="en-GB" altLang="fr-FR" b="1" dirty="0"/>
-              <a:t>pickling</a:t>
-            </a:r>
-            <a:endParaRPr lang="en-GB" altLang="fr-FR" dirty="0"/>
-          </a:p>
-          <a:p>
-            <a:r>
-              <a:rPr lang="en-GB" altLang="fr-FR" dirty="0" err="1"/>
-              <a:t>Reconstruire</a:t>
-            </a:r>
-            <a:r>
-              <a:rPr lang="en-GB" altLang="fr-FR" dirty="0"/>
-              <a:t> </a:t>
-            </a:r>
-            <a:r>
-              <a:rPr lang="en-GB" altLang="fr-FR" dirty="0" err="1"/>
-              <a:t>l'objet</a:t>
-            </a:r>
-            <a:r>
-              <a:rPr lang="en-GB" altLang="fr-FR" dirty="0"/>
-              <a:t> à </a:t>
-            </a:r>
-            <a:r>
-              <a:rPr lang="en-GB" altLang="fr-FR" dirty="0" err="1"/>
-              <a:t>partir</a:t>
-            </a:r>
-            <a:r>
-              <a:rPr lang="en-GB" altLang="fr-FR" dirty="0"/>
-              <a:t> de </a:t>
-            </a:r>
-            <a:r>
-              <a:rPr lang="en-GB" altLang="fr-FR" dirty="0" err="1"/>
-              <a:t>sa</a:t>
-            </a:r>
-            <a:r>
-              <a:rPr lang="en-GB" altLang="fr-FR" dirty="0"/>
-              <a:t> </a:t>
-            </a:r>
-            <a:r>
-              <a:rPr lang="en-GB" altLang="fr-FR" dirty="0" err="1"/>
-              <a:t>représentation</a:t>
-            </a:r>
-            <a:r>
-              <a:rPr lang="en-GB" altLang="fr-FR" dirty="0"/>
-              <a:t> </a:t>
-            </a:r>
-            <a:r>
-              <a:rPr lang="en-GB" altLang="fr-FR" dirty="0" err="1"/>
-              <a:t>en</a:t>
-            </a:r>
-            <a:r>
-              <a:rPr lang="en-GB" altLang="fr-FR" dirty="0"/>
-              <a:t> </a:t>
-            </a:r>
-            <a:r>
-              <a:rPr lang="en-GB" altLang="fr-FR" dirty="0" err="1"/>
-              <a:t>chaîne</a:t>
-            </a:r>
-            <a:r>
-              <a:rPr lang="en-GB" altLang="fr-FR" dirty="0"/>
-              <a:t> de </a:t>
-            </a:r>
-            <a:r>
-              <a:rPr lang="en-GB" altLang="fr-FR" dirty="0" err="1"/>
-              <a:t>caractères</a:t>
-            </a:r>
-            <a:r>
-              <a:rPr lang="en-GB" altLang="fr-FR" dirty="0"/>
-              <a:t> </a:t>
-            </a:r>
-            <a:r>
-              <a:rPr lang="en-GB" altLang="fr-FR" dirty="0" err="1"/>
-              <a:t>s'appelle</a:t>
-            </a:r>
-            <a:r>
-              <a:rPr lang="en-GB" altLang="fr-FR" dirty="0"/>
-              <a:t> </a:t>
-            </a:r>
-            <a:r>
-              <a:rPr lang="en-GB" altLang="fr-FR" b="1" dirty="0" err="1"/>
-              <a:t>unpickling</a:t>
-            </a:r>
-            <a:endParaRPr lang="en-GB" altLang="fr-FR" dirty="0"/>
-          </a:p>
-          <a:p>
-            <a:pPr lvl="1"/>
-            <a:r>
-              <a:rPr lang="en-GB" altLang="fr-FR" dirty="0"/>
-              <a:t>Entre pickling et </a:t>
-            </a:r>
-            <a:r>
-              <a:rPr lang="en-GB" altLang="fr-FR" dirty="0" err="1"/>
-              <a:t>unpickling</a:t>
-            </a:r>
-            <a:r>
-              <a:rPr lang="en-GB" altLang="fr-FR" dirty="0"/>
-              <a:t>, la </a:t>
-            </a:r>
-            <a:r>
-              <a:rPr lang="en-GB" altLang="fr-FR" dirty="0" err="1"/>
-              <a:t>chaîne</a:t>
-            </a:r>
-            <a:r>
-              <a:rPr lang="en-GB" altLang="fr-FR" dirty="0"/>
-              <a:t> de </a:t>
-            </a:r>
-            <a:r>
-              <a:rPr lang="en-GB" altLang="fr-FR" dirty="0" err="1"/>
-              <a:t>caractères</a:t>
-            </a:r>
-            <a:r>
-              <a:rPr lang="en-GB" altLang="fr-FR" dirty="0"/>
-              <a:t> </a:t>
-            </a:r>
-            <a:r>
-              <a:rPr lang="en-GB" altLang="fr-FR" dirty="0" err="1"/>
-              <a:t>représentant</a:t>
-            </a:r>
-            <a:r>
-              <a:rPr lang="en-GB" altLang="fr-FR" dirty="0"/>
-              <a:t> </a:t>
-            </a:r>
-            <a:r>
-              <a:rPr lang="en-GB" altLang="fr-FR" dirty="0" err="1"/>
-              <a:t>l'objet</a:t>
-            </a:r>
-            <a:r>
-              <a:rPr lang="en-GB" altLang="fr-FR" dirty="0"/>
-              <a:t> a </a:t>
-            </a:r>
-            <a:r>
-              <a:rPr lang="en-GB" altLang="fr-FR" dirty="0" err="1"/>
-              <a:t>pu</a:t>
-            </a:r>
-            <a:r>
-              <a:rPr lang="en-GB" altLang="fr-FR" dirty="0"/>
-              <a:t> </a:t>
-            </a:r>
-            <a:r>
-              <a:rPr lang="en-GB" altLang="fr-FR" dirty="0" err="1"/>
-              <a:t>avoir</a:t>
-            </a:r>
-            <a:r>
-              <a:rPr lang="en-GB" altLang="fr-FR" dirty="0"/>
-              <a:t> </a:t>
-            </a:r>
-            <a:r>
-              <a:rPr lang="en-GB" altLang="fr-FR" dirty="0" err="1"/>
-              <a:t>été</a:t>
-            </a:r>
-            <a:r>
-              <a:rPr lang="en-GB" altLang="fr-FR" dirty="0"/>
-              <a:t> </a:t>
-            </a:r>
-            <a:r>
-              <a:rPr lang="en-GB" altLang="fr-FR" dirty="0" err="1"/>
-              <a:t>enregistrée</a:t>
-            </a:r>
-            <a:r>
-              <a:rPr lang="en-GB" altLang="fr-FR" dirty="0"/>
-              <a:t> </a:t>
-            </a:r>
-            <a:r>
-              <a:rPr lang="en-GB" altLang="fr-FR" dirty="0" err="1"/>
-              <a:t>dans</a:t>
-            </a:r>
-            <a:r>
-              <a:rPr lang="en-GB" altLang="fr-FR" dirty="0"/>
-              <a:t> un </a:t>
-            </a:r>
-            <a:r>
-              <a:rPr lang="en-GB" altLang="fr-FR" dirty="0" err="1"/>
-              <a:t>fichier</a:t>
-            </a:r>
-            <a:r>
-              <a:rPr lang="en-GB" altLang="fr-FR" dirty="0"/>
-              <a:t>, </a:t>
-            </a:r>
-            <a:r>
-              <a:rPr lang="en-GB" altLang="fr-FR" dirty="0" err="1"/>
-              <a:t>ou</a:t>
-            </a:r>
-            <a:r>
-              <a:rPr lang="en-GB" altLang="fr-FR" dirty="0"/>
-              <a:t> </a:t>
-            </a:r>
-            <a:r>
-              <a:rPr lang="en-GB" altLang="fr-FR" dirty="0" err="1"/>
-              <a:t>avoir</a:t>
-            </a:r>
-            <a:r>
-              <a:rPr lang="en-GB" altLang="fr-FR" dirty="0"/>
-              <a:t> </a:t>
-            </a:r>
-            <a:r>
-              <a:rPr lang="en-GB" altLang="fr-FR" dirty="0" err="1"/>
-              <a:t>été</a:t>
-            </a:r>
-            <a:r>
-              <a:rPr lang="en-GB" altLang="fr-FR" dirty="0"/>
-              <a:t> </a:t>
-            </a:r>
-            <a:r>
-              <a:rPr lang="en-GB" altLang="fr-FR" dirty="0" err="1"/>
-              <a:t>envoyée</a:t>
-            </a:r>
-            <a:r>
-              <a:rPr lang="en-GB" altLang="fr-FR" dirty="0"/>
-              <a:t> à </a:t>
-            </a:r>
-            <a:r>
-              <a:rPr lang="en-GB" altLang="fr-FR" dirty="0" err="1"/>
-              <a:t>une</a:t>
-            </a:r>
-            <a:r>
-              <a:rPr lang="en-GB" altLang="fr-FR" dirty="0"/>
-              <a:t> machine </a:t>
-            </a:r>
-            <a:r>
-              <a:rPr lang="en-GB" altLang="fr-FR" dirty="0" err="1"/>
-              <a:t>éloignée</a:t>
-            </a:r>
-            <a:r>
-              <a:rPr lang="en-GB" altLang="fr-FR" dirty="0"/>
-              <a:t> via </a:t>
-            </a:r>
-            <a:r>
-              <a:rPr lang="en-GB" altLang="fr-FR" dirty="0" err="1"/>
-              <a:t>une</a:t>
-            </a:r>
-            <a:r>
-              <a:rPr lang="en-GB" altLang="fr-FR" dirty="0"/>
-              <a:t> connexion </a:t>
-            </a:r>
-            <a:r>
-              <a:rPr lang="en-GB" altLang="fr-FR" dirty="0" err="1"/>
-              <a:t>réseau</a:t>
-            </a:r>
-            <a:endParaRPr lang="fr-FR" dirty="0"/>
-          </a:p>
-        </p:txBody>
-      </p:sp>
-    </p:spTree>
-    <p:extLst>
-      <p:ext uri="{BB962C8B-B14F-4D97-AF65-F5344CB8AC3E}">
-        <p14:creationId xmlns:p14="http://schemas.microsoft.com/office/powerpoint/2010/main" val="321937878"/>
-      </p:ext>
-    </p:extLst>
-  </p:cSld>
-  <p:clrMapOvr>
-    <a:masterClrMapping/>
-  </p:clrMapOvr>
-</p:sld>
-</file>
-
-<file path=ppt/slides/slide12.xml><?xml version="1.0" encoding="utf-8"?>
-<p:sld xmlns:a="http://schemas.openxmlformats.org/drawingml/2006/main" xmlns:r="http://schemas.openxmlformats.org/officeDocument/2006/relationships" xmlns:p="http://schemas.openxmlformats.org/presentationml/2006/main">
-  <p:cSld>
-    <p:spTree>
-      <p:nvGrpSpPr>
-        <p:cNvPr id="1" name=""/>
-        <p:cNvGrpSpPr/>
-        <p:nvPr/>
-      </p:nvGrpSpPr>
-      <p:grpSpPr>
-        <a:xfrm>
-          <a:off x="0" y="0"/>
-          <a:ext cx="0" cy="0"/>
-          <a:chOff x="0" y="0"/>
-          <a:chExt cx="0" cy="0"/>
-        </a:xfrm>
-      </p:grpSpPr>
-      <p:sp>
-        <p:nvSpPr>
-          <p:cNvPr id="2" name="Titre 1"/>
-          <p:cNvSpPr>
-            <a:spLocks noGrp="1"/>
-          </p:cNvSpPr>
-          <p:nvPr>
-            <p:ph type="title"/>
-          </p:nvPr>
-        </p:nvSpPr>
-        <p:spPr/>
-        <p:txBody>
-          <a:bodyPr/>
-          <a:lstStyle/>
-          <a:p>
-            <a:r>
-              <a:rPr lang="fr-FR" dirty="0" err="1"/>
-              <a:t>Pickle</a:t>
-            </a:r>
-            <a:endParaRPr lang="fr-FR" dirty="0"/>
-          </a:p>
-        </p:txBody>
-      </p:sp>
-      <p:sp>
-        <p:nvSpPr>
-          <p:cNvPr id="3" name="Espace réservé du contenu 2"/>
-          <p:cNvSpPr>
-            <a:spLocks noGrp="1"/>
-          </p:cNvSpPr>
-          <p:nvPr>
-            <p:ph idx="1"/>
-          </p:nvPr>
-        </p:nvSpPr>
-        <p:spPr/>
-        <p:txBody>
-          <a:bodyPr/>
-          <a:lstStyle/>
-          <a:p>
-            <a:r>
-              <a:rPr lang="fr-FR" dirty="0"/>
               <a:t>Si vous avez un objet x, et un objet fichier f ouvert en écriture, la voie la plus simple de ``</a:t>
             </a:r>
             <a:r>
@@ -4465,515 +3908,7 @@
 </p:sld>
 </file>
 
-<file path=ppt/slides/slide13.xml><?xml version="1.0" encoding="utf-8"?>
-<p:sld xmlns:a="http://schemas.openxmlformats.org/drawingml/2006/main" xmlns:r="http://schemas.openxmlformats.org/officeDocument/2006/relationships" xmlns:p="http://schemas.openxmlformats.org/presentationml/2006/main">
-  <p:cSld>
-    <p:spTree>
-      <p:nvGrpSpPr>
-        <p:cNvPr id="1" name=""/>
-        <p:cNvGrpSpPr/>
-        <p:nvPr/>
-      </p:nvGrpSpPr>
-      <p:grpSpPr>
-        <a:xfrm>
-          <a:off x="0" y="0"/>
-          <a:ext cx="0" cy="0"/>
-          <a:chOff x="0" y="0"/>
-          <a:chExt cx="0" cy="0"/>
-        </a:xfrm>
-      </p:grpSpPr>
-      <p:sp>
-        <p:nvSpPr>
-          <p:cNvPr id="2" name="Titre 1">
-            <a:extLst>
-              <a:ext uri="{FF2B5EF4-FFF2-40B4-BE49-F238E27FC236}">
-                <a16:creationId xmlns:a16="http://schemas.microsoft.com/office/drawing/2014/main" id="{075EC8CF-5940-5BF8-24F8-47088357EEEE}"/>
-              </a:ext>
-            </a:extLst>
-          </p:cNvPr>
-          <p:cNvSpPr>
-            <a:spLocks noGrp="1"/>
-          </p:cNvSpPr>
-          <p:nvPr>
-            <p:ph type="title"/>
-          </p:nvPr>
-        </p:nvSpPr>
-        <p:spPr/>
-        <p:txBody>
-          <a:bodyPr/>
-          <a:lstStyle/>
-          <a:p>
-            <a:r>
-              <a:rPr lang="fr-FR" dirty="0" err="1"/>
-              <a:t>EMLearn</a:t>
-            </a:r>
-            <a:r>
-              <a:rPr lang="fr-FR" dirty="0"/>
-              <a:t> Python</a:t>
-            </a:r>
-          </a:p>
-        </p:txBody>
-      </p:sp>
-      <p:sp>
-        <p:nvSpPr>
-          <p:cNvPr id="3" name="Espace réservé du contenu 2">
-            <a:extLst>
-              <a:ext uri="{FF2B5EF4-FFF2-40B4-BE49-F238E27FC236}">
-                <a16:creationId xmlns:a16="http://schemas.microsoft.com/office/drawing/2014/main" id="{4AE321F9-A7CC-0926-30B3-A801A51F44E7}"/>
-              </a:ext>
-            </a:extLst>
-          </p:cNvPr>
-          <p:cNvSpPr>
-            <a:spLocks noGrp="1"/>
-          </p:cNvSpPr>
-          <p:nvPr>
-            <p:ph idx="1"/>
-          </p:nvPr>
-        </p:nvSpPr>
-        <p:spPr/>
-        <p:txBody>
-          <a:bodyPr/>
-          <a:lstStyle/>
-          <a:p>
-            <a:r>
-              <a:rPr lang="fr-FR" dirty="0" err="1"/>
-              <a:t>EMLearn</a:t>
-            </a:r>
-            <a:r>
-              <a:rPr lang="fr-FR" dirty="0"/>
-              <a:t> propose également une API Python pour pouvoir sauvegarder des modèles et des </a:t>
-            </a:r>
-            <a:r>
-              <a:rPr lang="fr-FR" dirty="0" err="1"/>
-              <a:t>scalers</a:t>
-            </a:r>
-            <a:endParaRPr lang="fr-FR" dirty="0"/>
-          </a:p>
-          <a:p>
-            <a:pPr lvl="1"/>
-            <a:r>
-              <a:rPr lang="fr-FR" dirty="0" err="1"/>
-              <a:t>cmodel</a:t>
-            </a:r>
-            <a:r>
-              <a:rPr lang="fr-FR" dirty="0"/>
-              <a:t> = </a:t>
-            </a:r>
-            <a:r>
-              <a:rPr lang="fr-FR" dirty="0" err="1"/>
-              <a:t>emlearn.convert</a:t>
-            </a:r>
-            <a:r>
-              <a:rPr lang="fr-FR" dirty="0"/>
-              <a:t>(model, </a:t>
-            </a:r>
-            <a:r>
-              <a:rPr lang="fr-FR" dirty="0" err="1"/>
-              <a:t>method</a:t>
-            </a:r>
-            <a:r>
-              <a:rPr lang="fr-FR" dirty="0"/>
-              <a:t>='</a:t>
-            </a:r>
-            <a:r>
-              <a:rPr lang="fr-FR" dirty="0" err="1"/>
-              <a:t>inline</a:t>
-            </a:r>
-            <a:r>
-              <a:rPr lang="fr-FR" dirty="0"/>
-              <a:t>')</a:t>
-            </a:r>
-          </a:p>
-          <a:p>
-            <a:pPr lvl="1"/>
-            <a:r>
-              <a:rPr lang="fr-FR" dirty="0" err="1"/>
-              <a:t>cmodel.save</a:t>
-            </a:r>
-            <a:r>
-              <a:rPr lang="fr-FR" dirty="0"/>
-              <a:t>(file="</a:t>
-            </a:r>
-            <a:r>
-              <a:rPr lang="fr-FR" dirty="0" err="1"/>
-              <a:t>path</a:t>
-            </a:r>
-            <a:r>
-              <a:rPr lang="fr-FR" dirty="0"/>
-              <a:t>", </a:t>
-            </a:r>
-            <a:r>
-              <a:rPr lang="fr-FR" dirty="0" err="1"/>
-              <a:t>name</a:t>
-            </a:r>
-            <a:r>
-              <a:rPr lang="fr-FR" dirty="0"/>
-              <a:t>='</a:t>
-            </a:r>
-            <a:r>
-              <a:rPr lang="fr-FR" dirty="0" err="1"/>
-              <a:t>rf</a:t>
-            </a:r>
-            <a:r>
-              <a:rPr lang="fr-FR" dirty="0"/>
-              <a:t>', format='csv')</a:t>
-            </a:r>
-          </a:p>
-          <a:p>
-            <a:endParaRPr lang="fr-FR" dirty="0"/>
-          </a:p>
-        </p:txBody>
-      </p:sp>
-    </p:spTree>
-    <p:extLst>
-      <p:ext uri="{BB962C8B-B14F-4D97-AF65-F5344CB8AC3E}">
-        <p14:creationId xmlns:p14="http://schemas.microsoft.com/office/powerpoint/2010/main" val="1791051253"/>
-      </p:ext>
-    </p:extLst>
-  </p:cSld>
-  <p:clrMapOvr>
-    <a:masterClrMapping/>
-  </p:clrMapOvr>
-</p:sld>
-</file>
-
-<file path=ppt/slides/slide14.xml><?xml version="1.0" encoding="utf-8"?>
-<p:sld xmlns:a="http://schemas.openxmlformats.org/drawingml/2006/main" xmlns:r="http://schemas.openxmlformats.org/officeDocument/2006/relationships" xmlns:p="http://schemas.openxmlformats.org/presentationml/2006/main">
-  <p:cSld>
-    <p:spTree>
-      <p:nvGrpSpPr>
-        <p:cNvPr id="1" name=""/>
-        <p:cNvGrpSpPr/>
-        <p:nvPr/>
-      </p:nvGrpSpPr>
-      <p:grpSpPr>
-        <a:xfrm>
-          <a:off x="0" y="0"/>
-          <a:ext cx="0" cy="0"/>
-          <a:chOff x="0" y="0"/>
-          <a:chExt cx="0" cy="0"/>
-        </a:xfrm>
-      </p:grpSpPr>
-      <p:sp>
-        <p:nvSpPr>
-          <p:cNvPr id="2" name="Titre 1">
-            <a:extLst>
-              <a:ext uri="{FF2B5EF4-FFF2-40B4-BE49-F238E27FC236}">
-                <a16:creationId xmlns:a16="http://schemas.microsoft.com/office/drawing/2014/main" id="{D9B0984B-C31F-4507-B93B-379E1A983053}"/>
-              </a:ext>
-            </a:extLst>
-          </p:cNvPr>
-          <p:cNvSpPr>
-            <a:spLocks noGrp="1"/>
-          </p:cNvSpPr>
-          <p:nvPr>
-            <p:ph type="title"/>
-          </p:nvPr>
-        </p:nvSpPr>
-        <p:spPr/>
-        <p:txBody>
-          <a:bodyPr/>
-          <a:lstStyle/>
-          <a:p>
-            <a:r>
-              <a:rPr lang="fr-FR" dirty="0"/>
-              <a:t>ONNX</a:t>
-            </a:r>
-          </a:p>
-        </p:txBody>
-      </p:sp>
-      <p:sp>
-        <p:nvSpPr>
-          <p:cNvPr id="3" name="Espace réservé du contenu 2">
-            <a:extLst>
-              <a:ext uri="{FF2B5EF4-FFF2-40B4-BE49-F238E27FC236}">
-                <a16:creationId xmlns:a16="http://schemas.microsoft.com/office/drawing/2014/main" id="{B8236F60-43BF-4292-8C86-19259F6CFC16}"/>
-              </a:ext>
-            </a:extLst>
-          </p:cNvPr>
-          <p:cNvSpPr>
-            <a:spLocks noGrp="1"/>
-          </p:cNvSpPr>
-          <p:nvPr>
-            <p:ph idx="1"/>
-          </p:nvPr>
-        </p:nvSpPr>
-        <p:spPr/>
-        <p:txBody>
-          <a:bodyPr/>
-          <a:lstStyle/>
-          <a:p>
-            <a:r>
-              <a:rPr lang="fr-FR" dirty="0"/>
-              <a:t>Open Neural Network Exchange</a:t>
-            </a:r>
-          </a:p>
-          <a:p>
-            <a:pPr lvl="1"/>
-            <a:r>
-              <a:rPr lang="fr-FR" dirty="0" err="1"/>
-              <a:t>pip</a:t>
-            </a:r>
-            <a:r>
-              <a:rPr lang="fr-FR" dirty="0"/>
-              <a:t> </a:t>
-            </a:r>
-            <a:r>
-              <a:rPr lang="fr-FR" dirty="0" err="1"/>
-              <a:t>install</a:t>
-            </a:r>
-            <a:r>
-              <a:rPr lang="fr-FR" dirty="0"/>
-              <a:t> skl2onnx</a:t>
-            </a:r>
-          </a:p>
-          <a:p>
-            <a:pPr marL="457200" lvl="1" indent="0">
-              <a:buNone/>
-            </a:pPr>
-            <a:r>
-              <a:rPr lang="fr-FR" sz="1600" dirty="0" err="1">
-                <a:latin typeface="Courier New" panose="02070309020205020404" pitchFamily="49" charset="0"/>
-                <a:cs typeface="Courier New" panose="02070309020205020404" pitchFamily="49" charset="0"/>
-              </a:rPr>
-              <a:t>initial_type</a:t>
-            </a:r>
-            <a:r>
-              <a:rPr lang="fr-FR" sz="1600" dirty="0">
-                <a:latin typeface="Courier New" panose="02070309020205020404" pitchFamily="49" charset="0"/>
-                <a:cs typeface="Courier New" panose="02070309020205020404" pitchFamily="49" charset="0"/>
-              </a:rPr>
-              <a:t> = [('</a:t>
-            </a:r>
-            <a:r>
-              <a:rPr lang="fr-FR" sz="1600" dirty="0" err="1">
-                <a:latin typeface="Courier New" panose="02070309020205020404" pitchFamily="49" charset="0"/>
-                <a:cs typeface="Courier New" panose="02070309020205020404" pitchFamily="49" charset="0"/>
-              </a:rPr>
-              <a:t>float_input</a:t>
-            </a:r>
-            <a:r>
-              <a:rPr lang="fr-FR" sz="1600" dirty="0">
-                <a:latin typeface="Courier New" panose="02070309020205020404" pitchFamily="49" charset="0"/>
-                <a:cs typeface="Courier New" panose="02070309020205020404" pitchFamily="49" charset="0"/>
-              </a:rPr>
-              <a:t>', </a:t>
-            </a:r>
-            <a:r>
-              <a:rPr lang="fr-FR" sz="1600" dirty="0" err="1">
-                <a:latin typeface="Courier New" panose="02070309020205020404" pitchFamily="49" charset="0"/>
-                <a:cs typeface="Courier New" panose="02070309020205020404" pitchFamily="49" charset="0"/>
-              </a:rPr>
-              <a:t>FloatTensorType</a:t>
-            </a:r>
-            <a:r>
-              <a:rPr lang="fr-FR" sz="1600" dirty="0">
-                <a:latin typeface="Courier New" panose="02070309020205020404" pitchFamily="49" charset="0"/>
-                <a:cs typeface="Courier New" panose="02070309020205020404" pitchFamily="49" charset="0"/>
-              </a:rPr>
-              <a:t>([None, 30]))]</a:t>
-            </a:r>
-          </a:p>
-          <a:p>
-            <a:pPr marL="457200" lvl="1" indent="0">
-              <a:buNone/>
-            </a:pPr>
-            <a:r>
-              <a:rPr lang="fr-FR" sz="1600" dirty="0" err="1">
-                <a:latin typeface="Courier New" panose="02070309020205020404" pitchFamily="49" charset="0"/>
-                <a:cs typeface="Courier New" panose="02070309020205020404" pitchFamily="49" charset="0"/>
-              </a:rPr>
-              <a:t>onnx</a:t>
-            </a:r>
-            <a:r>
-              <a:rPr lang="fr-FR" sz="1600" dirty="0">
-                <a:latin typeface="Courier New" panose="02070309020205020404" pitchFamily="49" charset="0"/>
-                <a:cs typeface="Courier New" panose="02070309020205020404" pitchFamily="49" charset="0"/>
-              </a:rPr>
-              <a:t> = </a:t>
-            </a:r>
-            <a:r>
-              <a:rPr lang="fr-FR" sz="1600" dirty="0" err="1">
-                <a:latin typeface="Courier New" panose="02070309020205020404" pitchFamily="49" charset="0"/>
-                <a:cs typeface="Courier New" panose="02070309020205020404" pitchFamily="49" charset="0"/>
-              </a:rPr>
-              <a:t>convert_sklearn</a:t>
-            </a:r>
-            <a:r>
-              <a:rPr lang="fr-FR" sz="1600" dirty="0">
-                <a:latin typeface="Courier New" panose="02070309020205020404" pitchFamily="49" charset="0"/>
-                <a:cs typeface="Courier New" panose="02070309020205020404" pitchFamily="49" charset="0"/>
-              </a:rPr>
-              <a:t>(model, </a:t>
-            </a:r>
-            <a:r>
-              <a:rPr lang="fr-FR" sz="1600" dirty="0" err="1">
-                <a:latin typeface="Courier New" panose="02070309020205020404" pitchFamily="49" charset="0"/>
-                <a:cs typeface="Courier New" panose="02070309020205020404" pitchFamily="49" charset="0"/>
-              </a:rPr>
-              <a:t>initial_types</a:t>
-            </a:r>
-            <a:r>
-              <a:rPr lang="fr-FR" sz="1600" dirty="0">
-                <a:latin typeface="Courier New" panose="02070309020205020404" pitchFamily="49" charset="0"/>
-                <a:cs typeface="Courier New" panose="02070309020205020404" pitchFamily="49" charset="0"/>
-              </a:rPr>
-              <a:t>=</a:t>
-            </a:r>
-            <a:r>
-              <a:rPr lang="fr-FR" sz="1600" dirty="0" err="1">
-                <a:latin typeface="Courier New" panose="02070309020205020404" pitchFamily="49" charset="0"/>
-                <a:cs typeface="Courier New" panose="02070309020205020404" pitchFamily="49" charset="0"/>
-              </a:rPr>
-              <a:t>initial_type</a:t>
-            </a:r>
-            <a:r>
-              <a:rPr lang="fr-FR" sz="1600" dirty="0">
-                <a:latin typeface="Courier New" panose="02070309020205020404" pitchFamily="49" charset="0"/>
-                <a:cs typeface="Courier New" panose="02070309020205020404" pitchFamily="49" charset="0"/>
-              </a:rPr>
-              <a:t>)</a:t>
-            </a:r>
-          </a:p>
-          <a:p>
-            <a:pPr marL="457200" lvl="1" indent="0">
-              <a:buNone/>
-            </a:pPr>
-            <a:r>
-              <a:rPr lang="fr-FR" sz="1600" dirty="0" err="1">
-                <a:latin typeface="Courier New" panose="02070309020205020404" pitchFamily="49" charset="0"/>
-                <a:cs typeface="Courier New" panose="02070309020205020404" pitchFamily="49" charset="0"/>
-              </a:rPr>
-              <a:t>with</a:t>
-            </a:r>
-            <a:r>
-              <a:rPr lang="fr-FR" sz="1600" dirty="0">
-                <a:latin typeface="Courier New" panose="02070309020205020404" pitchFamily="49" charset="0"/>
-                <a:cs typeface="Courier New" panose="02070309020205020404" pitchFamily="49" charset="0"/>
-              </a:rPr>
-              <a:t> open("</a:t>
-            </a:r>
-            <a:r>
-              <a:rPr lang="fr-FR" sz="1600" dirty="0" err="1">
-                <a:latin typeface="Courier New" panose="02070309020205020404" pitchFamily="49" charset="0"/>
-                <a:cs typeface="Courier New" panose="02070309020205020404" pitchFamily="49" charset="0"/>
-              </a:rPr>
-              <a:t>model.onnx</a:t>
-            </a:r>
-            <a:r>
-              <a:rPr lang="fr-FR" sz="1600" dirty="0">
-                <a:latin typeface="Courier New" panose="02070309020205020404" pitchFamily="49" charset="0"/>
-                <a:cs typeface="Courier New" panose="02070309020205020404" pitchFamily="49" charset="0"/>
-              </a:rPr>
-              <a:t>", "</a:t>
-            </a:r>
-            <a:r>
-              <a:rPr lang="fr-FR" sz="1600" dirty="0" err="1">
-                <a:latin typeface="Courier New" panose="02070309020205020404" pitchFamily="49" charset="0"/>
-                <a:cs typeface="Courier New" panose="02070309020205020404" pitchFamily="49" charset="0"/>
-              </a:rPr>
-              <a:t>wb</a:t>
-            </a:r>
-            <a:r>
-              <a:rPr lang="fr-FR" sz="1600" dirty="0">
-                <a:latin typeface="Courier New" panose="02070309020205020404" pitchFamily="49" charset="0"/>
-                <a:cs typeface="Courier New" panose="02070309020205020404" pitchFamily="49" charset="0"/>
-              </a:rPr>
-              <a:t>") as f:</a:t>
-            </a:r>
-          </a:p>
-          <a:p>
-            <a:pPr marL="457200" lvl="1" indent="0">
-              <a:buNone/>
-            </a:pPr>
-            <a:r>
-              <a:rPr lang="fr-FR" sz="1600" dirty="0">
-                <a:latin typeface="Courier New" panose="02070309020205020404" pitchFamily="49" charset="0"/>
-                <a:cs typeface="Courier New" panose="02070309020205020404" pitchFamily="49" charset="0"/>
-              </a:rPr>
-              <a:t>    </a:t>
-            </a:r>
-            <a:r>
-              <a:rPr lang="fr-FR" sz="1600" dirty="0" err="1">
-                <a:latin typeface="Courier New" panose="02070309020205020404" pitchFamily="49" charset="0"/>
-                <a:cs typeface="Courier New" panose="02070309020205020404" pitchFamily="49" charset="0"/>
-              </a:rPr>
-              <a:t>f.write</a:t>
-            </a:r>
-            <a:r>
-              <a:rPr lang="fr-FR" sz="1600" dirty="0">
-                <a:latin typeface="Courier New" panose="02070309020205020404" pitchFamily="49" charset="0"/>
-                <a:cs typeface="Courier New" panose="02070309020205020404" pitchFamily="49" charset="0"/>
-              </a:rPr>
-              <a:t>(</a:t>
-            </a:r>
-            <a:r>
-              <a:rPr lang="fr-FR" sz="1600" dirty="0" err="1">
-                <a:latin typeface="Courier New" panose="02070309020205020404" pitchFamily="49" charset="0"/>
-                <a:cs typeface="Courier New" panose="02070309020205020404" pitchFamily="49" charset="0"/>
-              </a:rPr>
-              <a:t>onnx.SerializeToString</a:t>
-            </a:r>
-            <a:r>
-              <a:rPr lang="fr-FR" sz="1600" dirty="0">
-                <a:latin typeface="Courier New" panose="02070309020205020404" pitchFamily="49" charset="0"/>
-                <a:cs typeface="Courier New" panose="02070309020205020404" pitchFamily="49" charset="0"/>
-              </a:rPr>
-              <a:t>())</a:t>
-            </a:r>
-          </a:p>
-          <a:p>
-            <a:r>
-              <a:rPr lang="fr-FR" dirty="0"/>
-              <a:t>.NET</a:t>
-            </a:r>
-          </a:p>
-          <a:p>
-            <a:pPr lvl="1"/>
-            <a:r>
-              <a:rPr lang="fr-FR" sz="2000" dirty="0"/>
-              <a:t>new </a:t>
-            </a:r>
-            <a:r>
-              <a:rPr lang="fr-FR" sz="2000" dirty="0" err="1"/>
-              <a:t>InferenceSession</a:t>
-            </a:r>
-            <a:r>
-              <a:rPr lang="fr-FR" sz="2000" dirty="0"/>
-              <a:t>("</a:t>
-            </a:r>
-            <a:r>
-              <a:rPr lang="fr-FR" sz="2000" dirty="0" err="1"/>
-              <a:t>model.onnx</a:t>
-            </a:r>
-            <a:r>
-              <a:rPr lang="fr-FR" sz="2000" dirty="0"/>
-              <a:t>")</a:t>
-            </a:r>
-          </a:p>
-          <a:p>
-            <a:pPr lvl="1"/>
-            <a:r>
-              <a:rPr lang="fr-FR" sz="2000" dirty="0"/>
-              <a:t>https://towardsdatascience.com/deploy-sci-kit-learn-models-in-net-core-applications-90e24e572f64</a:t>
-            </a:r>
-          </a:p>
-        </p:txBody>
-      </p:sp>
-    </p:spTree>
-    <p:extLst>
-      <p:ext uri="{BB962C8B-B14F-4D97-AF65-F5344CB8AC3E}">
-        <p14:creationId xmlns:p14="http://schemas.microsoft.com/office/powerpoint/2010/main" val="4017057312"/>
-      </p:ext>
-    </p:extLst>
-  </p:cSld>
-  <p:clrMapOvr>
-    <a:masterClrMapping/>
-  </p:clrMapOvr>
-</p:sld>
-</file>
-
-<file path=ppt/slides/slide15.xml><?xml version="1.0" encoding="utf-8"?>
+<file path=ppt/slides/slide11.xml><?xml version="1.0" encoding="utf-8"?>
 <p:sld xmlns:a="http://schemas.openxmlformats.org/drawingml/2006/main" xmlns:r="http://schemas.openxmlformats.org/officeDocument/2006/relationships" xmlns:p="http://schemas.openxmlformats.org/presentationml/2006/main">
   <p:cSld>
     <p:spTree>
@@ -5373,86 +4308,6 @@
       </p:grpSpPr>
       <p:sp>
         <p:nvSpPr>
-          <p:cNvPr id="2" name="Titre 1">
-            <a:extLst>
-              <a:ext uri="{FF2B5EF4-FFF2-40B4-BE49-F238E27FC236}">
-                <a16:creationId xmlns:a16="http://schemas.microsoft.com/office/drawing/2014/main" id="{0479AA96-9460-A972-2FFF-372DBDD0E639}"/>
-              </a:ext>
-            </a:extLst>
-          </p:cNvPr>
-          <p:cNvSpPr>
-            <a:spLocks noGrp="1"/>
-          </p:cNvSpPr>
-          <p:nvPr>
-            <p:ph type="title"/>
-          </p:nvPr>
-        </p:nvSpPr>
-        <p:spPr/>
-        <p:txBody>
-          <a:bodyPr/>
-          <a:lstStyle/>
-          <a:p>
-            <a:endParaRPr lang="fr-FR"/>
-          </a:p>
-        </p:txBody>
-      </p:sp>
-      <p:sp>
-        <p:nvSpPr>
-          <p:cNvPr id="3" name="Espace réservé du contenu 2">
-            <a:extLst>
-              <a:ext uri="{FF2B5EF4-FFF2-40B4-BE49-F238E27FC236}">
-                <a16:creationId xmlns:a16="http://schemas.microsoft.com/office/drawing/2014/main" id="{A34D6FF6-8E53-6101-CF7B-BFEC81DBE983}"/>
-              </a:ext>
-            </a:extLst>
-          </p:cNvPr>
-          <p:cNvSpPr>
-            <a:spLocks noGrp="1"/>
-          </p:cNvSpPr>
-          <p:nvPr>
-            <p:ph idx="1"/>
-          </p:nvPr>
-        </p:nvSpPr>
-        <p:spPr/>
-        <p:txBody>
-          <a:bodyPr/>
-          <a:lstStyle/>
-          <a:p>
-            <a:endParaRPr lang="fr-FR"/>
-          </a:p>
-        </p:txBody>
-      </p:sp>
-    </p:spTree>
-    <p:extLst>
-      <p:ext uri="{BB962C8B-B14F-4D97-AF65-F5344CB8AC3E}">
-        <p14:creationId xmlns:p14="http://schemas.microsoft.com/office/powerpoint/2010/main" val="3168784124"/>
-      </p:ext>
-    </p:extLst>
-  </p:cSld>
-  <p:clrMapOvr>
-    <a:masterClrMapping/>
-  </p:clrMapOvr>
-</p:sld>
-</file>
-
-<file path=ppt/slides/slide5.xml><?xml version="1.0" encoding="utf-8"?>
-<p:sld xmlns:a="http://schemas.openxmlformats.org/drawingml/2006/main" xmlns:r="http://schemas.openxmlformats.org/officeDocument/2006/relationships" xmlns:p="http://schemas.openxmlformats.org/presentationml/2006/main">
-  <p:cSld>
-    <p:spTree>
-      <p:nvGrpSpPr>
-        <p:cNvPr id="1" name=""/>
-        <p:cNvGrpSpPr/>
-        <p:nvPr/>
-      </p:nvGrpSpPr>
-      <p:grpSpPr>
-        <a:xfrm>
-          <a:off x="0" y="0"/>
-          <a:ext cx="0" cy="0"/>
-          <a:chOff x="0" y="0"/>
-          <a:chExt cx="0" cy="0"/>
-        </a:xfrm>
-      </p:grpSpPr>
-      <p:sp>
-        <p:nvSpPr>
           <p:cNvPr id="2" name="Titre 1"/>
           <p:cNvSpPr>
             <a:spLocks noGrp="1"/>
@@ -5467,8 +4322,12 @@
           <a:lstStyle/>
           <a:p>
             <a:r>
+              <a:rPr lang="fr-FR" dirty="0" err="1"/>
+              <a:t>Random</a:t>
+            </a:r>
+            <a:r>
               <a:rPr lang="fr-FR" dirty="0"/>
-              <a:t>Asymétrie</a:t>
+              <a:t> Forest</a:t>
             </a:r>
           </a:p>
         </p:txBody>
@@ -5489,109 +4348,6 @@
           <a:lstStyle/>
           <a:p>
             <a:r>
-              <a:rPr lang="fr-FR" dirty="0" err="1"/>
-              <a:t>Random</a:t>
-            </a:r>
-            <a:r>
-              <a:rPr lang="fr-FR" dirty="0"/>
-              <a:t> Forest est un modèle asymétrique</a:t>
-            </a:r>
-          </a:p>
-          <a:p>
-            <a:pPr lvl="1"/>
-            <a:r>
-              <a:rPr lang="fr-FR" dirty="0"/>
-              <a:t>Apprentissage couteux</a:t>
-            </a:r>
-          </a:p>
-          <a:p>
-            <a:pPr lvl="1"/>
-            <a:r>
-              <a:rPr lang="fr-FR" dirty="0"/>
-              <a:t>Prédiction rapide</a:t>
-            </a:r>
-          </a:p>
-          <a:p>
-            <a:pPr lvl="1"/>
-            <a:r>
-              <a:rPr lang="fr-FR" dirty="0"/>
-              <a:t>Très utile</a:t>
-            </a:r>
-          </a:p>
-        </p:txBody>
-      </p:sp>
-    </p:spTree>
-    <p:extLst>
-      <p:ext uri="{BB962C8B-B14F-4D97-AF65-F5344CB8AC3E}">
-        <p14:creationId xmlns:p14="http://schemas.microsoft.com/office/powerpoint/2010/main" val="847402067"/>
-      </p:ext>
-    </p:extLst>
-  </p:cSld>
-  <p:clrMapOvr>
-    <a:masterClrMapping/>
-  </p:clrMapOvr>
-</p:sld>
-</file>
-
-<file path=ppt/slides/slide6.xml><?xml version="1.0" encoding="utf-8"?>
-<p:sld xmlns:a="http://schemas.openxmlformats.org/drawingml/2006/main" xmlns:r="http://schemas.openxmlformats.org/officeDocument/2006/relationships" xmlns:p="http://schemas.openxmlformats.org/presentationml/2006/main">
-  <p:cSld>
-    <p:spTree>
-      <p:nvGrpSpPr>
-        <p:cNvPr id="1" name=""/>
-        <p:cNvGrpSpPr/>
-        <p:nvPr/>
-      </p:nvGrpSpPr>
-      <p:grpSpPr>
-        <a:xfrm>
-          <a:off x="0" y="0"/>
-          <a:ext cx="0" cy="0"/>
-          <a:chOff x="0" y="0"/>
-          <a:chExt cx="0" cy="0"/>
-        </a:xfrm>
-      </p:grpSpPr>
-      <p:sp>
-        <p:nvSpPr>
-          <p:cNvPr id="2" name="Titre 1"/>
-          <p:cNvSpPr>
-            <a:spLocks noGrp="1"/>
-          </p:cNvSpPr>
-          <p:nvPr>
-            <p:ph type="title"/>
-          </p:nvPr>
-        </p:nvSpPr>
-        <p:spPr/>
-        <p:txBody>
-          <a:bodyPr/>
-          <a:lstStyle/>
-          <a:p>
-            <a:r>
-              <a:rPr lang="fr-FR" dirty="0" err="1"/>
-              <a:t>Random</a:t>
-            </a:r>
-            <a:r>
-              <a:rPr lang="fr-FR" dirty="0"/>
-              <a:t> Forest</a:t>
-            </a:r>
-          </a:p>
-        </p:txBody>
-      </p:sp>
-      <p:sp>
-        <p:nvSpPr>
-          <p:cNvPr id="3" name="Espace réservé du contenu 2"/>
-          <p:cNvSpPr>
-            <a:spLocks noGrp="1"/>
-          </p:cNvSpPr>
-          <p:nvPr>
-            <p:ph idx="1"/>
-          </p:nvPr>
-        </p:nvSpPr>
-        <p:spPr/>
-        <p:txBody>
-          <a:bodyPr/>
-          <a:lstStyle/>
-          <a:p>
-            <a:r>
               <a:rPr lang="fr-FR" dirty="0"/>
               <a:t>Exemple</a:t>
             </a:r>
@@ -5672,7 +4428,7 @@
 </p:sld>
 </file>
 
-<file path=ppt/slides/slide7.xml><?xml version="1.0" encoding="utf-8"?>
+<file path=ppt/slides/slide5.xml><?xml version="1.0" encoding="utf-8"?>
 <p:sld xmlns:a="http://schemas.openxmlformats.org/drawingml/2006/main" xmlns:r="http://schemas.openxmlformats.org/officeDocument/2006/relationships" xmlns:p="http://schemas.openxmlformats.org/presentationml/2006/main">
   <p:cSld>
     <p:spTree>
@@ -5784,6 +4540,223 @@
 </p:sld>
 </file>
 
+<file path=ppt/slides/slide6.xml><?xml version="1.0" encoding="utf-8"?>
+<p:sld xmlns:a="http://schemas.openxmlformats.org/drawingml/2006/main" xmlns:r="http://schemas.openxmlformats.org/officeDocument/2006/relationships" xmlns:p="http://schemas.openxmlformats.org/presentationml/2006/main">
+  <p:cSld>
+    <p:spTree>
+      <p:nvGrpSpPr>
+        <p:cNvPr id="1" name=""/>
+        <p:cNvGrpSpPr/>
+        <p:nvPr/>
+      </p:nvGrpSpPr>
+      <p:grpSpPr>
+        <a:xfrm>
+          <a:off x="0" y="0"/>
+          <a:ext cx="0" cy="0"/>
+          <a:chOff x="0" y="0"/>
+          <a:chExt cx="0" cy="0"/>
+        </a:xfrm>
+      </p:grpSpPr>
+      <p:sp>
+        <p:nvSpPr>
+          <p:cNvPr id="2" name="Titre 1"/>
+          <p:cNvSpPr>
+            <a:spLocks noGrp="1"/>
+          </p:cNvSpPr>
+          <p:nvPr>
+            <p:ph type="title"/>
+          </p:nvPr>
+        </p:nvSpPr>
+        <p:spPr/>
+        <p:txBody>
+          <a:bodyPr/>
+          <a:lstStyle/>
+          <a:p>
+            <a:r>
+              <a:rPr lang="fr-FR" dirty="0"/>
+              <a:t>Importances des </a:t>
+            </a:r>
+            <a:r>
+              <a:rPr lang="fr-FR" dirty="0" err="1"/>
+              <a:t>features</a:t>
+            </a:r>
+            <a:endParaRPr lang="fr-FR" dirty="0"/>
+          </a:p>
+        </p:txBody>
+      </p:sp>
+      <p:sp>
+        <p:nvSpPr>
+          <p:cNvPr id="3" name="Espace réservé du contenu 2"/>
+          <p:cNvSpPr>
+            <a:spLocks noGrp="1"/>
+          </p:cNvSpPr>
+          <p:nvPr>
+            <p:ph idx="1"/>
+          </p:nvPr>
+        </p:nvSpPr>
+        <p:spPr/>
+        <p:txBody>
+          <a:bodyPr/>
+          <a:lstStyle/>
+          <a:p>
+            <a:r>
+              <a:rPr lang="fr-FR" dirty="0"/>
+              <a:t>Les précédents algorithmes ne permettaient pas de connaître l'importance de chaque </a:t>
+            </a:r>
+            <a:r>
+              <a:rPr lang="fr-FR" dirty="0" err="1"/>
+              <a:t>feature</a:t>
+            </a:r>
+            <a:endParaRPr lang="fr-FR" dirty="0"/>
+          </a:p>
+          <a:p>
+            <a:r>
+              <a:rPr lang="fr-FR" dirty="0"/>
+              <a:t>Il est souvent utile de savoir les </a:t>
+            </a:r>
+            <a:r>
+              <a:rPr lang="fr-FR" dirty="0" err="1"/>
+              <a:t>features</a:t>
+            </a:r>
+            <a:r>
+              <a:rPr lang="fr-FR" dirty="0"/>
+              <a:t> prépondérantes</a:t>
+            </a:r>
+          </a:p>
+          <a:p>
+            <a:pPr lvl="1"/>
+            <a:r>
+              <a:rPr lang="fr-FR" dirty="0"/>
+              <a:t>Et l'inverse celle qui ne le sont pas</a:t>
+            </a:r>
+          </a:p>
+          <a:p>
+            <a:pPr lvl="1"/>
+            <a:r>
+              <a:rPr lang="fr-FR" dirty="0"/>
+              <a:t>Permet de faire baisser le nombre de dimension</a:t>
+            </a:r>
+          </a:p>
+          <a:p>
+            <a:pPr lvl="1"/>
+            <a:endParaRPr lang="fr-FR" dirty="0"/>
+          </a:p>
+          <a:p>
+            <a:endParaRPr lang="fr-FR" dirty="0"/>
+          </a:p>
+        </p:txBody>
+      </p:sp>
+    </p:spTree>
+    <p:extLst>
+      <p:ext uri="{BB962C8B-B14F-4D97-AF65-F5344CB8AC3E}">
+        <p14:creationId xmlns:p14="http://schemas.microsoft.com/office/powerpoint/2010/main" val="1701734456"/>
+      </p:ext>
+    </p:extLst>
+  </p:cSld>
+  <p:clrMapOvr>
+    <a:masterClrMapping/>
+  </p:clrMapOvr>
+</p:sld>
+</file>
+
+<file path=ppt/slides/slide7.xml><?xml version="1.0" encoding="utf-8"?>
+<p:sld xmlns:a="http://schemas.openxmlformats.org/drawingml/2006/main" xmlns:r="http://schemas.openxmlformats.org/officeDocument/2006/relationships" xmlns:p="http://schemas.openxmlformats.org/presentationml/2006/main">
+  <p:cSld>
+    <p:spTree>
+      <p:nvGrpSpPr>
+        <p:cNvPr id="1" name=""/>
+        <p:cNvGrpSpPr/>
+        <p:nvPr/>
+      </p:nvGrpSpPr>
+      <p:grpSpPr>
+        <a:xfrm>
+          <a:off x="0" y="0"/>
+          <a:ext cx="0" cy="0"/>
+          <a:chOff x="0" y="0"/>
+          <a:chExt cx="0" cy="0"/>
+        </a:xfrm>
+      </p:grpSpPr>
+      <p:sp>
+        <p:nvSpPr>
+          <p:cNvPr id="2" name="Titre 1"/>
+          <p:cNvSpPr>
+            <a:spLocks noGrp="1"/>
+          </p:cNvSpPr>
+          <p:nvPr>
+            <p:ph type="title"/>
+          </p:nvPr>
+        </p:nvSpPr>
+        <p:spPr/>
+        <p:txBody>
+          <a:bodyPr/>
+          <a:lstStyle/>
+          <a:p>
+            <a:r>
+              <a:rPr lang="fr-FR" dirty="0"/>
+              <a:t>Importance </a:t>
+            </a:r>
+            <a:r>
+              <a:rPr lang="fr-FR" dirty="0" err="1"/>
+              <a:t>Feature</a:t>
+            </a:r>
+            <a:endParaRPr lang="fr-FR" dirty="0"/>
+          </a:p>
+        </p:txBody>
+      </p:sp>
+      <p:sp>
+        <p:nvSpPr>
+          <p:cNvPr id="3" name="Espace réservé du contenu 2"/>
+          <p:cNvSpPr>
+            <a:spLocks noGrp="1"/>
+          </p:cNvSpPr>
+          <p:nvPr>
+            <p:ph idx="1"/>
+          </p:nvPr>
+        </p:nvSpPr>
+        <p:spPr/>
+        <p:txBody>
+          <a:bodyPr/>
+          <a:lstStyle/>
+          <a:p>
+            <a:r>
+              <a:rPr lang="fr-FR" dirty="0" err="1"/>
+              <a:t>forest.feature_importances</a:t>
+            </a:r>
+            <a:r>
+              <a:rPr lang="fr-FR" dirty="0"/>
+              <a:t>_</a:t>
+            </a:r>
+          </a:p>
+          <a:p>
+            <a:pPr lvl="1"/>
+            <a:r>
+              <a:rPr lang="fr-FR" dirty="0"/>
+              <a:t>Permet de donner pour chaque </a:t>
+            </a:r>
+            <a:r>
+              <a:rPr lang="fr-FR" dirty="0" err="1"/>
+              <a:t>feature</a:t>
+            </a:r>
+            <a:r>
+              <a:rPr lang="fr-FR" dirty="0"/>
+              <a:t> son importance sur 1</a:t>
+            </a:r>
+          </a:p>
+        </p:txBody>
+      </p:sp>
+    </p:spTree>
+    <p:extLst>
+      <p:ext uri="{BB962C8B-B14F-4D97-AF65-F5344CB8AC3E}">
+        <p14:creationId xmlns:p14="http://schemas.microsoft.com/office/powerpoint/2010/main" val="2784811699"/>
+      </p:ext>
+    </p:extLst>
+  </p:cSld>
+  <p:clrMapOvr>
+    <a:masterClrMapping/>
+  </p:clrMapOvr>
+</p:sld>
+</file>
+
 <file path=ppt/slides/slide8.xml><?xml version="1.0" encoding="utf-8"?>
 <p:sld xmlns:a="http://schemas.openxmlformats.org/drawingml/2006/main" xmlns:r="http://schemas.openxmlformats.org/officeDocument/2006/relationships" xmlns:p="http://schemas.openxmlformats.org/presentationml/2006/main">
   <p:cSld>
@@ -5818,13 +4791,8 @@
           <a:p>
             <a:r>
               <a:rPr lang="fr-FR" dirty="0"/>
-              <a:t>Importances des </a:t>
-            </a:r>
-            <a:r>
-              <a:rPr lang="fr-FR" dirty="0" err="1"/>
-              <a:t>features</a:t>
-            </a:r>
-            <a:endParaRPr lang="fr-FR" dirty="0"/>
+              <a:t>Sérialisation du modèle</a:t>
+            </a:r>
           </a:p>
         </p:txBody>
       </p:sp>
@@ -5845,47 +4813,44 @@
           <a:p>
             <a:r>
               <a:rPr lang="fr-FR" dirty="0"/>
-              <a:t>Les précédents algorithmes ne permettaient pas de connaître l'importance de chaque </a:t>
-            </a:r>
+              <a:t>Transformation d’un objet en binaire</a:t>
+            </a:r>
+          </a:p>
+          <a:p>
+            <a:pPr lvl="1"/>
+            <a:r>
+              <a:rPr lang="fr-FR" dirty="0"/>
+              <a:t>Sérialisation</a:t>
+            </a:r>
+          </a:p>
+          <a:p>
+            <a:pPr lvl="1"/>
             <a:r>
               <a:rPr lang="fr-FR" dirty="0" err="1"/>
-              <a:t>feature</a:t>
+              <a:t>Marshalling</a:t>
             </a:r>
             <a:endParaRPr lang="fr-FR" dirty="0"/>
           </a:p>
           <a:p>
             <a:r>
               <a:rPr lang="fr-FR" dirty="0"/>
-              <a:t>Il est souvent utile de savoir les </a:t>
-            </a:r>
+              <a:t>Transformation inverse</a:t>
+            </a:r>
+          </a:p>
+          <a:p>
+            <a:pPr lvl="1"/>
             <a:r>
               <a:rPr lang="fr-FR" dirty="0" err="1"/>
-              <a:t>features</a:t>
-            </a:r>
-            <a:r>
-              <a:rPr lang="fr-FR" dirty="0"/>
-              <a:t> prépondérantes</a:t>
-            </a:r>
+              <a:t>Désérialisation</a:t>
+            </a:r>
+            <a:endParaRPr lang="fr-FR" dirty="0"/>
           </a:p>
           <a:p>
             <a:pPr lvl="1"/>
             <a:r>
-              <a:rPr lang="fr-FR" dirty="0"/>
-              <a:t>Et l'inverse celle qui ne le sont pas</a:t>
-            </a:r>
-          </a:p>
-          <a:p>
-            <a:pPr lvl="1"/>
-            <a:r>
-              <a:rPr lang="fr-FR" dirty="0"/>
-              <a:t>Permet de faire baisser le nombre de dimension</a:t>
-            </a:r>
-          </a:p>
-          <a:p>
-            <a:pPr lvl="1"/>
-            <a:endParaRPr lang="fr-FR" dirty="0"/>
-          </a:p>
-          <a:p>
+              <a:rPr lang="fr-FR" dirty="0" err="1"/>
+              <a:t>Unmarshalling</a:t>
+            </a:r>
             <a:endParaRPr lang="fr-FR" dirty="0"/>
           </a:p>
         </p:txBody>
@@ -5893,7 +4858,7 @@
     </p:spTree>
     <p:extLst>
       <p:ext uri="{BB962C8B-B14F-4D97-AF65-F5344CB8AC3E}">
-        <p14:creationId xmlns:p14="http://schemas.microsoft.com/office/powerpoint/2010/main" val="1701734456"/>
+        <p14:creationId xmlns:p14="http://schemas.microsoft.com/office/powerpoint/2010/main" val="131513215"/>
       </p:ext>
     </p:extLst>
   </p:cSld>
@@ -5936,12 +4901,8 @@
           <a:lstStyle/>
           <a:p>
             <a:r>
-              <a:rPr lang="fr-FR" dirty="0"/>
-              <a:t>Importance </a:t>
-            </a:r>
-            <a:r>
               <a:rPr lang="fr-FR" dirty="0" err="1"/>
-              <a:t>Feature</a:t>
+              <a:t>Pickle</a:t>
             </a:r>
             <a:endParaRPr lang="fr-FR" dirty="0"/>
           </a:p>
@@ -5963,35 +4924,383 @@
           <a:lstStyle/>
           <a:p>
             <a:r>
-              <a:rPr lang="fr-FR" dirty="0" err="1"/>
-              <a:t>forest.feature_importances</a:t>
-            </a:r>
-            <a:r>
-              <a:rPr lang="fr-FR" dirty="0"/>
-              <a:t>_</a:t>
-            </a:r>
+              <a:rPr lang="en-GB" altLang="fr-FR" dirty="0" err="1"/>
+              <a:t>C'est</a:t>
+            </a:r>
+            <a:r>
+              <a:rPr lang="en-GB" altLang="fr-FR" dirty="0"/>
+              <a:t> un module </a:t>
+            </a:r>
+            <a:r>
+              <a:rPr lang="en-GB" altLang="fr-FR" dirty="0" err="1"/>
+              <a:t>étonnant</a:t>
+            </a:r>
+            <a:r>
+              <a:rPr lang="en-GB" altLang="fr-FR" dirty="0"/>
+              <a:t> qui </a:t>
+            </a:r>
+            <a:r>
+              <a:rPr lang="en-GB" altLang="fr-FR" dirty="0" err="1"/>
+              <a:t>peut</a:t>
+            </a:r>
+            <a:r>
+              <a:rPr lang="en-GB" altLang="fr-FR" dirty="0"/>
+              <a:t> </a:t>
+            </a:r>
+            <a:r>
+              <a:rPr lang="en-GB" altLang="fr-FR" dirty="0" err="1"/>
+              <a:t>prendre</a:t>
+            </a:r>
+            <a:r>
+              <a:rPr lang="en-GB" altLang="fr-FR" dirty="0"/>
+              <a:t> </a:t>
+            </a:r>
+            <a:r>
+              <a:rPr lang="en-GB" altLang="fr-FR" dirty="0" err="1"/>
+              <a:t>presque</a:t>
+            </a:r>
+            <a:r>
+              <a:rPr lang="en-GB" altLang="fr-FR" dirty="0"/>
+              <a:t> </a:t>
+            </a:r>
+            <a:r>
+              <a:rPr lang="en-GB" altLang="fr-FR" dirty="0" err="1"/>
+              <a:t>n'importe</a:t>
+            </a:r>
+            <a:r>
+              <a:rPr lang="en-GB" altLang="fr-FR" dirty="0"/>
+              <a:t> </a:t>
+            </a:r>
+            <a:r>
+              <a:rPr lang="en-GB" altLang="fr-FR" dirty="0" err="1"/>
+              <a:t>quel</a:t>
+            </a:r>
+            <a:r>
+              <a:rPr lang="en-GB" altLang="fr-FR" dirty="0"/>
+              <a:t> objet Python, et le </a:t>
+            </a:r>
+            <a:r>
+              <a:rPr lang="en-GB" altLang="fr-FR" dirty="0" err="1"/>
+              <a:t>convertir</a:t>
+            </a:r>
+            <a:r>
+              <a:rPr lang="en-GB" altLang="fr-FR" dirty="0"/>
+              <a:t> </a:t>
+            </a:r>
+            <a:r>
+              <a:rPr lang="en-GB" altLang="fr-FR" dirty="0" err="1"/>
+              <a:t>en</a:t>
+            </a:r>
+            <a:r>
+              <a:rPr lang="en-GB" altLang="fr-FR" dirty="0"/>
+              <a:t> </a:t>
+            </a:r>
+            <a:r>
+              <a:rPr lang="en-GB" altLang="fr-FR" dirty="0" err="1"/>
+              <a:t>une</a:t>
+            </a:r>
+            <a:r>
+              <a:rPr lang="en-GB" altLang="fr-FR" dirty="0"/>
+              <a:t> </a:t>
+            </a:r>
+            <a:r>
+              <a:rPr lang="en-GB" altLang="fr-FR" dirty="0" err="1"/>
+              <a:t>représentation</a:t>
+            </a:r>
+            <a:r>
+              <a:rPr lang="en-GB" altLang="fr-FR" dirty="0"/>
+              <a:t> sous </a:t>
+            </a:r>
+            <a:r>
+              <a:rPr lang="en-GB" altLang="fr-FR" dirty="0" err="1"/>
+              <a:t>forme</a:t>
+            </a:r>
+            <a:r>
+              <a:rPr lang="en-GB" altLang="fr-FR" dirty="0"/>
+              <a:t> de </a:t>
+            </a:r>
+            <a:r>
+              <a:rPr lang="en-GB" altLang="fr-FR" dirty="0" err="1"/>
+              <a:t>chaîne</a:t>
+            </a:r>
+            <a:r>
+              <a:rPr lang="en-GB" altLang="fr-FR" dirty="0"/>
+              <a:t> de </a:t>
+            </a:r>
+            <a:r>
+              <a:rPr lang="en-GB" altLang="fr-FR" dirty="0" err="1"/>
+              <a:t>caractères</a:t>
+            </a:r>
+            <a:endParaRPr lang="en-GB" altLang="fr-FR" dirty="0"/>
+          </a:p>
+          <a:p>
+            <a:r>
+              <a:rPr lang="en-GB" altLang="fr-FR" dirty="0"/>
+              <a:t>Ce </a:t>
+            </a:r>
+            <a:r>
+              <a:rPr lang="en-GB" altLang="fr-FR" dirty="0" err="1"/>
+              <a:t>processus</a:t>
+            </a:r>
+            <a:r>
+              <a:rPr lang="en-GB" altLang="fr-FR" dirty="0"/>
+              <a:t> </a:t>
+            </a:r>
+            <a:r>
+              <a:rPr lang="en-GB" altLang="fr-FR" dirty="0" err="1"/>
+              <a:t>s'appelle</a:t>
+            </a:r>
+            <a:r>
+              <a:rPr lang="en-GB" altLang="fr-FR" dirty="0"/>
+              <a:t> </a:t>
+            </a:r>
+            <a:r>
+              <a:rPr lang="en-GB" altLang="fr-FR" b="1" dirty="0"/>
+              <a:t>pickling</a:t>
+            </a:r>
+            <a:endParaRPr lang="en-GB" altLang="fr-FR" dirty="0"/>
+          </a:p>
+          <a:p>
+            <a:r>
+              <a:rPr lang="en-GB" altLang="fr-FR" dirty="0" err="1"/>
+              <a:t>Reconstruire</a:t>
+            </a:r>
+            <a:r>
+              <a:rPr lang="en-GB" altLang="fr-FR" dirty="0"/>
+              <a:t> </a:t>
+            </a:r>
+            <a:r>
+              <a:rPr lang="en-GB" altLang="fr-FR" dirty="0" err="1"/>
+              <a:t>l'objet</a:t>
+            </a:r>
+            <a:r>
+              <a:rPr lang="en-GB" altLang="fr-FR" dirty="0"/>
+              <a:t> à </a:t>
+            </a:r>
+            <a:r>
+              <a:rPr lang="en-GB" altLang="fr-FR" dirty="0" err="1"/>
+              <a:t>partir</a:t>
+            </a:r>
+            <a:r>
+              <a:rPr lang="en-GB" altLang="fr-FR" dirty="0"/>
+              <a:t> de </a:t>
+            </a:r>
+            <a:r>
+              <a:rPr lang="en-GB" altLang="fr-FR" dirty="0" err="1"/>
+              <a:t>sa</a:t>
+            </a:r>
+            <a:r>
+              <a:rPr lang="en-GB" altLang="fr-FR" dirty="0"/>
+              <a:t> </a:t>
+            </a:r>
+            <a:r>
+              <a:rPr lang="en-GB" altLang="fr-FR" dirty="0" err="1"/>
+              <a:t>représentation</a:t>
+            </a:r>
+            <a:r>
+              <a:rPr lang="en-GB" altLang="fr-FR" dirty="0"/>
+              <a:t> </a:t>
+            </a:r>
+            <a:r>
+              <a:rPr lang="en-GB" altLang="fr-FR" dirty="0" err="1"/>
+              <a:t>en</a:t>
+            </a:r>
+            <a:r>
+              <a:rPr lang="en-GB" altLang="fr-FR" dirty="0"/>
+              <a:t> </a:t>
+            </a:r>
+            <a:r>
+              <a:rPr lang="en-GB" altLang="fr-FR" dirty="0" err="1"/>
+              <a:t>chaîne</a:t>
+            </a:r>
+            <a:r>
+              <a:rPr lang="en-GB" altLang="fr-FR" dirty="0"/>
+              <a:t> de </a:t>
+            </a:r>
+            <a:r>
+              <a:rPr lang="en-GB" altLang="fr-FR" dirty="0" err="1"/>
+              <a:t>caractères</a:t>
+            </a:r>
+            <a:r>
+              <a:rPr lang="en-GB" altLang="fr-FR" dirty="0"/>
+              <a:t> </a:t>
+            </a:r>
+            <a:r>
+              <a:rPr lang="en-GB" altLang="fr-FR" dirty="0" err="1"/>
+              <a:t>s'appelle</a:t>
+            </a:r>
+            <a:r>
+              <a:rPr lang="en-GB" altLang="fr-FR" dirty="0"/>
+              <a:t> </a:t>
+            </a:r>
+            <a:r>
+              <a:rPr lang="en-GB" altLang="fr-FR" b="1" dirty="0" err="1"/>
+              <a:t>unpickling</a:t>
+            </a:r>
+            <a:endParaRPr lang="en-GB" altLang="fr-FR" dirty="0"/>
           </a:p>
           <a:p>
             <a:pPr lvl="1"/>
             <a:r>
-              <a:rPr lang="fr-FR" dirty="0"/>
-              <a:t>Permet de donner pour chaque </a:t>
-            </a:r>
-            <a:r>
-              <a:rPr lang="fr-FR" dirty="0" err="1"/>
-              <a:t>feature</a:t>
-            </a:r>
-            <a:r>
-              <a:rPr lang="fr-FR" dirty="0"/>
-              <a:t> son importance sur 1</a:t>
-            </a:r>
+              <a:rPr lang="en-GB" altLang="fr-FR" dirty="0"/>
+              <a:t>Entre pickling et </a:t>
+            </a:r>
+            <a:r>
+              <a:rPr lang="en-GB" altLang="fr-FR" dirty="0" err="1"/>
+              <a:t>unpickling</a:t>
+            </a:r>
+            <a:r>
+              <a:rPr lang="en-GB" altLang="fr-FR" dirty="0"/>
+              <a:t>, la </a:t>
+            </a:r>
+            <a:r>
+              <a:rPr lang="en-GB" altLang="fr-FR" dirty="0" err="1"/>
+              <a:t>chaîne</a:t>
+            </a:r>
+            <a:r>
+              <a:rPr lang="en-GB" altLang="fr-FR" dirty="0"/>
+              <a:t> de </a:t>
+            </a:r>
+            <a:r>
+              <a:rPr lang="en-GB" altLang="fr-FR" dirty="0" err="1"/>
+              <a:t>caractères</a:t>
+            </a:r>
+            <a:r>
+              <a:rPr lang="en-GB" altLang="fr-FR" dirty="0"/>
+              <a:t> </a:t>
+            </a:r>
+            <a:r>
+              <a:rPr lang="en-GB" altLang="fr-FR" dirty="0" err="1"/>
+              <a:t>représentant</a:t>
+            </a:r>
+            <a:r>
+              <a:rPr lang="en-GB" altLang="fr-FR" dirty="0"/>
+              <a:t> </a:t>
+            </a:r>
+            <a:r>
+              <a:rPr lang="en-GB" altLang="fr-FR" dirty="0" err="1"/>
+              <a:t>l'objet</a:t>
+            </a:r>
+            <a:r>
+              <a:rPr lang="en-GB" altLang="fr-FR" dirty="0"/>
+              <a:t> a </a:t>
+            </a:r>
+            <a:r>
+              <a:rPr lang="en-GB" altLang="fr-FR" dirty="0" err="1"/>
+              <a:t>pu</a:t>
+            </a:r>
+            <a:r>
+              <a:rPr lang="en-GB" altLang="fr-FR" dirty="0"/>
+              <a:t> </a:t>
+            </a:r>
+            <a:r>
+              <a:rPr lang="en-GB" altLang="fr-FR" dirty="0" err="1"/>
+              <a:t>avoir</a:t>
+            </a:r>
+            <a:r>
+              <a:rPr lang="en-GB" altLang="fr-FR" dirty="0"/>
+              <a:t> </a:t>
+            </a:r>
+            <a:r>
+              <a:rPr lang="en-GB" altLang="fr-FR" dirty="0" err="1"/>
+              <a:t>été</a:t>
+            </a:r>
+            <a:r>
+              <a:rPr lang="en-GB" altLang="fr-FR" dirty="0"/>
+              <a:t> </a:t>
+            </a:r>
+            <a:r>
+              <a:rPr lang="en-GB" altLang="fr-FR" dirty="0" err="1"/>
+              <a:t>enregistrée</a:t>
+            </a:r>
+            <a:r>
+              <a:rPr lang="en-GB" altLang="fr-FR" dirty="0"/>
+              <a:t> </a:t>
+            </a:r>
+            <a:r>
+              <a:rPr lang="en-GB" altLang="fr-FR" dirty="0" err="1"/>
+              <a:t>dans</a:t>
+            </a:r>
+            <a:r>
+              <a:rPr lang="en-GB" altLang="fr-FR" dirty="0"/>
+              <a:t> un </a:t>
+            </a:r>
+            <a:r>
+              <a:rPr lang="en-GB" altLang="fr-FR" dirty="0" err="1"/>
+              <a:t>fichier</a:t>
+            </a:r>
+            <a:r>
+              <a:rPr lang="en-GB" altLang="fr-FR" dirty="0"/>
+              <a:t>, </a:t>
+            </a:r>
+            <a:r>
+              <a:rPr lang="en-GB" altLang="fr-FR" dirty="0" err="1"/>
+              <a:t>ou</a:t>
+            </a:r>
+            <a:r>
+              <a:rPr lang="en-GB" altLang="fr-FR" dirty="0"/>
+              <a:t> </a:t>
+            </a:r>
+            <a:r>
+              <a:rPr lang="en-GB" altLang="fr-FR" dirty="0" err="1"/>
+              <a:t>avoir</a:t>
+            </a:r>
+            <a:r>
+              <a:rPr lang="en-GB" altLang="fr-FR" dirty="0"/>
+              <a:t> </a:t>
+            </a:r>
+            <a:r>
+              <a:rPr lang="en-GB" altLang="fr-FR" dirty="0" err="1"/>
+              <a:t>été</a:t>
+            </a:r>
+            <a:r>
+              <a:rPr lang="en-GB" altLang="fr-FR" dirty="0"/>
+              <a:t> </a:t>
+            </a:r>
+            <a:r>
+              <a:rPr lang="en-GB" altLang="fr-FR" dirty="0" err="1"/>
+              <a:t>envoyée</a:t>
+            </a:r>
+            <a:r>
+              <a:rPr lang="en-GB" altLang="fr-FR" dirty="0"/>
+              <a:t> à </a:t>
+            </a:r>
+            <a:r>
+              <a:rPr lang="en-GB" altLang="fr-FR" dirty="0" err="1"/>
+              <a:t>une</a:t>
+            </a:r>
+            <a:r>
+              <a:rPr lang="en-GB" altLang="fr-FR" dirty="0"/>
+              <a:t> machine </a:t>
+            </a:r>
+            <a:r>
+              <a:rPr lang="en-GB" altLang="fr-FR" dirty="0" err="1"/>
+              <a:t>éloignée</a:t>
+            </a:r>
+            <a:r>
+              <a:rPr lang="en-GB" altLang="fr-FR" dirty="0"/>
+              <a:t> via </a:t>
+            </a:r>
+            <a:r>
+              <a:rPr lang="en-GB" altLang="fr-FR" dirty="0" err="1"/>
+              <a:t>une</a:t>
+            </a:r>
+            <a:r>
+              <a:rPr lang="en-GB" altLang="fr-FR" dirty="0"/>
+              <a:t> connexion </a:t>
+            </a:r>
+            <a:r>
+              <a:rPr lang="en-GB" altLang="fr-FR" dirty="0" err="1"/>
+              <a:t>réseau</a:t>
+            </a:r>
+            <a:endParaRPr lang="fr-FR" dirty="0"/>
           </a:p>
         </p:txBody>
       </p:sp>
     </p:spTree>
     <p:extLst>
       <p:ext uri="{BB962C8B-B14F-4D97-AF65-F5344CB8AC3E}">
-        <p14:creationId xmlns:p14="http://schemas.microsoft.com/office/powerpoint/2010/main" val="2784811699"/>
+        <p14:creationId xmlns:p14="http://schemas.microsoft.com/office/powerpoint/2010/main" val="321937878"/>
       </p:ext>
     </p:extLst>
   </p:cSld>
